--- a/docs/sources/Presentation.pptx
+++ b/docs/sources/Presentation.pptx
@@ -155,7 +155,7 @@
       </p:grpSpPr>
       <p:sp>
         <p:nvSpPr>
-          <p:cNvPr id="277125601" name="Header Placeholder 1"/>
+          <p:cNvPr id="548702955" name="Header Placeholder 1"/>
           <p:cNvSpPr>
             <a:spLocks noGrp="1"/>
           </p:cNvSpPr>
@@ -189,7 +189,7 @@
       </p:sp>
       <p:sp>
         <p:nvSpPr>
-          <p:cNvPr id="1341080499" name="Date Placeholder 2"/>
+          <p:cNvPr id="951647882" name="Date Placeholder 2"/>
           <p:cNvSpPr>
             <a:spLocks noGrp="1"/>
           </p:cNvSpPr>
@@ -223,7 +223,7 @@
       </p:sp>
       <p:sp>
         <p:nvSpPr>
-          <p:cNvPr id="1799190085" name="Date Placeholder 2"/>
+          <p:cNvPr id="335773467" name="Date Placeholder 2"/>
           <p:cNvSpPr>
             <a:spLocks noGrp="1"/>
           </p:cNvSpPr>
@@ -257,7 +257,7 @@
       </p:sp>
       <p:sp>
         <p:nvSpPr>
-          <p:cNvPr id="1167231590" name="Notes Placeholder 4"/>
+          <p:cNvPr id="1115084268" name="Notes Placeholder 4"/>
           <p:cNvSpPr>
             <a:spLocks noGrp="1"/>
           </p:cNvSpPr>
@@ -287,7 +287,7 @@
       </p:sp>
       <p:sp>
         <p:nvSpPr>
-          <p:cNvPr id="1213492279" name="Footer Placeholder 5"/>
+          <p:cNvPr id="387555370" name="Footer Placeholder 5"/>
           <p:cNvSpPr>
             <a:spLocks noGrp="1"/>
           </p:cNvSpPr>
@@ -321,7 +321,7 @@
       </p:sp>
       <p:sp>
         <p:nvSpPr>
-          <p:cNvPr id="1200126653" name="Slide Number Placeholder 6"/>
+          <p:cNvPr id="1750296891" name="Slide Number Placeholder 6"/>
           <p:cNvSpPr>
             <a:spLocks noGrp="1"/>
           </p:cNvSpPr>
@@ -470,7 +470,7 @@
       </p:grpSpPr>
       <p:sp>
         <p:nvSpPr>
-          <p:cNvPr id="1696876013" name="Slide Image Placeholder 1"/>
+          <p:cNvPr id="672438841" name="Slide Image Placeholder 1"/>
           <p:cNvSpPr>
             <a:spLocks noChangeAspect="1" noGrp="1" noRot="1"/>
           </p:cNvSpPr>
@@ -482,7 +482,7 @@
       </p:sp>
       <p:sp>
         <p:nvSpPr>
-          <p:cNvPr id="566731917" name="Notes Placeholder 2"/>
+          <p:cNvPr id="1357677442" name="Notes Placeholder 2"/>
           <p:cNvSpPr>
             <a:spLocks noGrp="1"/>
           </p:cNvSpPr>
@@ -504,7 +504,7 @@
       </p:sp>
       <p:sp>
         <p:nvSpPr>
-          <p:cNvPr id="28451638" name="Slide Number Placeholder 3"/>
+          <p:cNvPr id="656192408" name="Slide Number Placeholder 3"/>
           <p:cNvSpPr>
             <a:spLocks noGrp="1"/>
           </p:cNvSpPr>
@@ -555,7 +555,7 @@
       </p:grpSpPr>
       <p:sp>
         <p:nvSpPr>
-          <p:cNvPr id="2079162589" name="Slide Image Placeholder 1"/>
+          <p:cNvPr id="2059201772" name="Slide Image Placeholder 1"/>
           <p:cNvSpPr>
             <a:spLocks noChangeAspect="1" noGrp="1" noRot="1"/>
           </p:cNvSpPr>
@@ -567,7 +567,7 @@
       </p:sp>
       <p:sp>
         <p:nvSpPr>
-          <p:cNvPr id="101155406" name="Notes Placeholder 2"/>
+          <p:cNvPr id="946260558" name="Notes Placeholder 2"/>
           <p:cNvSpPr>
             <a:spLocks noGrp="1"/>
           </p:cNvSpPr>
@@ -589,7 +589,7 @@
       </p:sp>
       <p:sp>
         <p:nvSpPr>
-          <p:cNvPr id="2124710135" name="Slide Number Placeholder 3"/>
+          <p:cNvPr id="1878323602" name="Slide Number Placeholder 3"/>
           <p:cNvSpPr>
             <a:spLocks noGrp="1"/>
           </p:cNvSpPr>
@@ -640,7 +640,7 @@
       </p:grpSpPr>
       <p:sp>
         <p:nvSpPr>
-          <p:cNvPr id="373319367" name="Slide Image Placeholder 1"/>
+          <p:cNvPr id="829375344" name="Slide Image Placeholder 1"/>
           <p:cNvSpPr>
             <a:spLocks noChangeAspect="1" noGrp="1" noRot="1"/>
           </p:cNvSpPr>
@@ -652,7 +652,7 @@
       </p:sp>
       <p:sp>
         <p:nvSpPr>
-          <p:cNvPr id="362857240" name="Notes Placeholder 2"/>
+          <p:cNvPr id="384409761" name="Notes Placeholder 2"/>
           <p:cNvSpPr>
             <a:spLocks noGrp="1"/>
           </p:cNvSpPr>
@@ -674,7 +674,7 @@
       </p:sp>
       <p:sp>
         <p:nvSpPr>
-          <p:cNvPr id="658812879" name="Slide Number Placeholder 3"/>
+          <p:cNvPr id="1474207206" name="Slide Number Placeholder 3"/>
           <p:cNvSpPr>
             <a:spLocks noGrp="1"/>
           </p:cNvSpPr>
@@ -725,7 +725,7 @@
       </p:grpSpPr>
       <p:sp>
         <p:nvSpPr>
-          <p:cNvPr id="2022841879" name="Slide Image Placeholder 1"/>
+          <p:cNvPr id="194586971" name="Slide Image Placeholder 1"/>
           <p:cNvSpPr>
             <a:spLocks noChangeAspect="1" noGrp="1" noRot="1"/>
           </p:cNvSpPr>
@@ -737,7 +737,7 @@
       </p:sp>
       <p:sp>
         <p:nvSpPr>
-          <p:cNvPr id="991613842" name="Notes Placeholder 2"/>
+          <p:cNvPr id="1851061053" name="Notes Placeholder 2"/>
           <p:cNvSpPr>
             <a:spLocks noGrp="1"/>
           </p:cNvSpPr>
@@ -759,7 +759,7 @@
       </p:sp>
       <p:sp>
         <p:nvSpPr>
-          <p:cNvPr id="1465633919" name="Slide Number Placeholder 3"/>
+          <p:cNvPr id="451372750" name="Slide Number Placeholder 3"/>
           <p:cNvSpPr>
             <a:spLocks noGrp="1"/>
           </p:cNvSpPr>
@@ -810,7 +810,7 @@
       </p:grpSpPr>
       <p:sp>
         <p:nvSpPr>
-          <p:cNvPr id="1793566048" name="Slide Image Placeholder 1"/>
+          <p:cNvPr id="1853849650" name="Slide Image Placeholder 1"/>
           <p:cNvSpPr>
             <a:spLocks noChangeAspect="1" noGrp="1" noRot="1"/>
           </p:cNvSpPr>
@@ -822,7 +822,7 @@
       </p:sp>
       <p:sp>
         <p:nvSpPr>
-          <p:cNvPr id="630169076" name="Notes Placeholder 2"/>
+          <p:cNvPr id="32974578" name="Notes Placeholder 2"/>
           <p:cNvSpPr>
             <a:spLocks noGrp="1"/>
           </p:cNvSpPr>
@@ -844,7 +844,7 @@
       </p:sp>
       <p:sp>
         <p:nvSpPr>
-          <p:cNvPr id="926971354" name="Slide Number Placeholder 3"/>
+          <p:cNvPr id="57816038" name="Slide Number Placeholder 3"/>
           <p:cNvSpPr>
             <a:spLocks noGrp="1"/>
           </p:cNvSpPr>
@@ -895,7 +895,7 @@
       </p:grpSpPr>
       <p:sp>
         <p:nvSpPr>
-          <p:cNvPr id="238841702" name="Slide Image Placeholder 1"/>
+          <p:cNvPr id="1199609832" name="Slide Image Placeholder 1"/>
           <p:cNvSpPr>
             <a:spLocks noChangeAspect="1" noGrp="1" noRot="1"/>
           </p:cNvSpPr>
@@ -907,7 +907,7 @@
       </p:sp>
       <p:sp>
         <p:nvSpPr>
-          <p:cNvPr id="709492572" name="Notes Placeholder 2"/>
+          <p:cNvPr id="696580709" name="Notes Placeholder 2"/>
           <p:cNvSpPr>
             <a:spLocks noGrp="1"/>
           </p:cNvSpPr>
@@ -929,7 +929,7 @@
       </p:sp>
       <p:sp>
         <p:nvSpPr>
-          <p:cNvPr id="1053813124" name="Slide Number Placeholder 3"/>
+          <p:cNvPr id="1322190022" name="Slide Number Placeholder 3"/>
           <p:cNvSpPr>
             <a:spLocks noGrp="1"/>
           </p:cNvSpPr>
@@ -980,7 +980,7 @@
       </p:grpSpPr>
       <p:sp>
         <p:nvSpPr>
-          <p:cNvPr id="1980935483" name="Slide Image Placeholder 1"/>
+          <p:cNvPr id="2052217941" name="Slide Image Placeholder 1"/>
           <p:cNvSpPr>
             <a:spLocks noChangeAspect="1" noGrp="1" noRot="1"/>
           </p:cNvSpPr>
@@ -992,7 +992,7 @@
       </p:sp>
       <p:sp>
         <p:nvSpPr>
-          <p:cNvPr id="579786315" name="Notes Placeholder 2"/>
+          <p:cNvPr id="891011398" name="Notes Placeholder 2"/>
           <p:cNvSpPr>
             <a:spLocks noGrp="1"/>
           </p:cNvSpPr>
@@ -1014,7 +1014,7 @@
       </p:sp>
       <p:sp>
         <p:nvSpPr>
-          <p:cNvPr id="739908135" name="Slide Number Placeholder 3"/>
+          <p:cNvPr id="382680374" name="Slide Number Placeholder 3"/>
           <p:cNvSpPr>
             <a:spLocks noGrp="1"/>
           </p:cNvSpPr>
@@ -1065,7 +1065,7 @@
       </p:grpSpPr>
       <p:sp>
         <p:nvSpPr>
-          <p:cNvPr id="87879380" name="Slide Image Placeholder 1"/>
+          <p:cNvPr id="1290507620" name="Slide Image Placeholder 1"/>
           <p:cNvSpPr>
             <a:spLocks noChangeAspect="1" noGrp="1" noRot="1"/>
           </p:cNvSpPr>
@@ -1077,7 +1077,7 @@
       </p:sp>
       <p:sp>
         <p:nvSpPr>
-          <p:cNvPr id="739061280" name="Notes Placeholder 2"/>
+          <p:cNvPr id="1458003185" name="Notes Placeholder 2"/>
           <p:cNvSpPr>
             <a:spLocks noGrp="1"/>
           </p:cNvSpPr>
@@ -1099,7 +1099,7 @@
       </p:sp>
       <p:sp>
         <p:nvSpPr>
-          <p:cNvPr id="1429351925" name="Slide Number Placeholder 3"/>
+          <p:cNvPr id="194548003" name="Slide Number Placeholder 3"/>
           <p:cNvSpPr>
             <a:spLocks noGrp="1"/>
           </p:cNvSpPr>
@@ -1150,7 +1150,7 @@
       </p:grpSpPr>
       <p:sp>
         <p:nvSpPr>
-          <p:cNvPr id="1464482358" name="Slide Image Placeholder 1"/>
+          <p:cNvPr id="2111042031" name="Slide Image Placeholder 1"/>
           <p:cNvSpPr>
             <a:spLocks noChangeAspect="1" noGrp="1" noRot="1"/>
           </p:cNvSpPr>
@@ -1162,7 +1162,7 @@
       </p:sp>
       <p:sp>
         <p:nvSpPr>
-          <p:cNvPr id="959170867" name="Notes Placeholder 2"/>
+          <p:cNvPr id="2071574290" name="Notes Placeholder 2"/>
           <p:cNvSpPr>
             <a:spLocks noGrp="1"/>
           </p:cNvSpPr>
@@ -1184,7 +1184,7 @@
       </p:sp>
       <p:sp>
         <p:nvSpPr>
-          <p:cNvPr id="1107707689" name="Slide Number Placeholder 3"/>
+          <p:cNvPr id="1343721293" name="Slide Number Placeholder 3"/>
           <p:cNvSpPr>
             <a:spLocks noGrp="1"/>
           </p:cNvSpPr>
@@ -1235,7 +1235,7 @@
       </p:grpSpPr>
       <p:sp>
         <p:nvSpPr>
-          <p:cNvPr id="1634321508" name="Slide Image Placeholder 1"/>
+          <p:cNvPr id="1753447407" name="Slide Image Placeholder 1"/>
           <p:cNvSpPr>
             <a:spLocks noChangeAspect="1" noGrp="1" noRot="1"/>
           </p:cNvSpPr>
@@ -1247,7 +1247,7 @@
       </p:sp>
       <p:sp>
         <p:nvSpPr>
-          <p:cNvPr id="607147548" name="Notes Placeholder 2"/>
+          <p:cNvPr id="1178265909" name="Notes Placeholder 2"/>
           <p:cNvSpPr>
             <a:spLocks noGrp="1"/>
           </p:cNvSpPr>
@@ -1269,7 +1269,7 @@
       </p:sp>
       <p:sp>
         <p:nvSpPr>
-          <p:cNvPr id="385697770" name="Slide Number Placeholder 3"/>
+          <p:cNvPr id="891248037" name="Slide Number Placeholder 3"/>
           <p:cNvSpPr>
             <a:spLocks noGrp="1"/>
           </p:cNvSpPr>
@@ -1320,7 +1320,7 @@
       </p:grpSpPr>
       <p:sp>
         <p:nvSpPr>
-          <p:cNvPr id="893609257" name="Slide Image Placeholder 1"/>
+          <p:cNvPr id="311142400" name="Slide Image Placeholder 1"/>
           <p:cNvSpPr>
             <a:spLocks noChangeAspect="1" noGrp="1" noRot="1"/>
           </p:cNvSpPr>
@@ -1332,7 +1332,7 @@
       </p:sp>
       <p:sp>
         <p:nvSpPr>
-          <p:cNvPr id="1121886415" name="Notes Placeholder 2"/>
+          <p:cNvPr id="455126177" name="Notes Placeholder 2"/>
           <p:cNvSpPr>
             <a:spLocks noGrp="1"/>
           </p:cNvSpPr>
@@ -1354,7 +1354,7 @@
       </p:sp>
       <p:sp>
         <p:nvSpPr>
-          <p:cNvPr id="96015002" name="Slide Number Placeholder 3"/>
+          <p:cNvPr id="782280152" name="Slide Number Placeholder 3"/>
           <p:cNvSpPr>
             <a:spLocks noGrp="1"/>
           </p:cNvSpPr>
@@ -1405,7 +1405,7 @@
       </p:grpSpPr>
       <p:sp>
         <p:nvSpPr>
-          <p:cNvPr id="54593126" name="Slide Image Placeholder 1"/>
+          <p:cNvPr id="1924148486" name="Slide Image Placeholder 1"/>
           <p:cNvSpPr>
             <a:spLocks noChangeAspect="1" noGrp="1" noRot="1"/>
           </p:cNvSpPr>
@@ -1417,7 +1417,7 @@
       </p:sp>
       <p:sp>
         <p:nvSpPr>
-          <p:cNvPr id="319469682" name="Notes Placeholder 2"/>
+          <p:cNvPr id="889591229" name="Notes Placeholder 2"/>
           <p:cNvSpPr>
             <a:spLocks noGrp="1"/>
           </p:cNvSpPr>
@@ -1439,7 +1439,7 @@
       </p:sp>
       <p:sp>
         <p:nvSpPr>
-          <p:cNvPr id="1176878926" name="Slide Number Placeholder 3"/>
+          <p:cNvPr id="1033785612" name="Slide Number Placeholder 3"/>
           <p:cNvSpPr>
             <a:spLocks noGrp="1"/>
           </p:cNvSpPr>
@@ -1490,7 +1490,7 @@
       </p:grpSpPr>
       <p:sp>
         <p:nvSpPr>
-          <p:cNvPr id="359852502" name="Slide Image Placeholder 1"/>
+          <p:cNvPr id="1281504394" name="Slide Image Placeholder 1"/>
           <p:cNvSpPr>
             <a:spLocks noChangeAspect="1" noGrp="1" noRot="1"/>
           </p:cNvSpPr>
@@ -1502,7 +1502,7 @@
       </p:sp>
       <p:sp>
         <p:nvSpPr>
-          <p:cNvPr id="1963847250" name="Notes Placeholder 2"/>
+          <p:cNvPr id="747010581" name="Notes Placeholder 2"/>
           <p:cNvSpPr>
             <a:spLocks noGrp="1"/>
           </p:cNvSpPr>
@@ -1524,7 +1524,7 @@
       </p:sp>
       <p:sp>
         <p:nvSpPr>
-          <p:cNvPr id="771492254" name="Slide Number Placeholder 3"/>
+          <p:cNvPr id="214143366" name="Slide Number Placeholder 3"/>
           <p:cNvSpPr>
             <a:spLocks noGrp="1"/>
           </p:cNvSpPr>
@@ -1575,7 +1575,7 @@
       </p:grpSpPr>
       <p:sp>
         <p:nvSpPr>
-          <p:cNvPr id="1971106587" name="Slide Image Placeholder 1"/>
+          <p:cNvPr id="229457422" name="Slide Image Placeholder 1"/>
           <p:cNvSpPr>
             <a:spLocks noChangeAspect="1" noGrp="1" noRot="1"/>
           </p:cNvSpPr>
@@ -1587,7 +1587,7 @@
       </p:sp>
       <p:sp>
         <p:nvSpPr>
-          <p:cNvPr id="1771269431" name="Notes Placeholder 2"/>
+          <p:cNvPr id="1694249377" name="Notes Placeholder 2"/>
           <p:cNvSpPr>
             <a:spLocks noGrp="1"/>
           </p:cNvSpPr>
@@ -1609,7 +1609,7 @@
       </p:sp>
       <p:sp>
         <p:nvSpPr>
-          <p:cNvPr id="903694162" name="Slide Number Placeholder 3"/>
+          <p:cNvPr id="107225557" name="Slide Number Placeholder 3"/>
           <p:cNvSpPr>
             <a:spLocks noGrp="1"/>
           </p:cNvSpPr>
@@ -1660,7 +1660,7 @@
       </p:grpSpPr>
       <p:sp>
         <p:nvSpPr>
-          <p:cNvPr id="1312143929" name="Slide Image Placeholder 1"/>
+          <p:cNvPr id="1267782175" name="Slide Image Placeholder 1"/>
           <p:cNvSpPr>
             <a:spLocks noChangeAspect="1" noGrp="1" noRot="1"/>
           </p:cNvSpPr>
@@ -1672,7 +1672,7 @@
       </p:sp>
       <p:sp>
         <p:nvSpPr>
-          <p:cNvPr id="2123621208" name="Notes Placeholder 2"/>
+          <p:cNvPr id="22454035" name="Notes Placeholder 2"/>
           <p:cNvSpPr>
             <a:spLocks noGrp="1"/>
           </p:cNvSpPr>
@@ -1694,7 +1694,7 @@
       </p:sp>
       <p:sp>
         <p:nvSpPr>
-          <p:cNvPr id="1180052547" name="Slide Number Placeholder 3"/>
+          <p:cNvPr id="699718694" name="Slide Number Placeholder 3"/>
           <p:cNvSpPr>
             <a:spLocks noGrp="1"/>
           </p:cNvSpPr>
@@ -1745,7 +1745,7 @@
       </p:grpSpPr>
       <p:sp>
         <p:nvSpPr>
-          <p:cNvPr id="1238036838" name="Slide Image Placeholder 1"/>
+          <p:cNvPr id="985329435" name="Slide Image Placeholder 1"/>
           <p:cNvSpPr>
             <a:spLocks noChangeAspect="1" noGrp="1" noRot="1"/>
           </p:cNvSpPr>
@@ -1757,7 +1757,7 @@
       </p:sp>
       <p:sp>
         <p:nvSpPr>
-          <p:cNvPr id="1989146698" name="Notes Placeholder 2"/>
+          <p:cNvPr id="998872235" name="Notes Placeholder 2"/>
           <p:cNvSpPr>
             <a:spLocks noGrp="1"/>
           </p:cNvSpPr>
@@ -1779,7 +1779,7 @@
       </p:sp>
       <p:sp>
         <p:nvSpPr>
-          <p:cNvPr id="234304240" name="Slide Number Placeholder 3"/>
+          <p:cNvPr id="1534620556" name="Slide Number Placeholder 3"/>
           <p:cNvSpPr>
             <a:spLocks noGrp="1"/>
           </p:cNvSpPr>
@@ -1830,7 +1830,7 @@
       </p:grpSpPr>
       <p:sp>
         <p:nvSpPr>
-          <p:cNvPr id="1352612465" name="Slide Image Placeholder 1"/>
+          <p:cNvPr id="98815110" name="Slide Image Placeholder 1"/>
           <p:cNvSpPr>
             <a:spLocks noChangeAspect="1" noGrp="1" noRot="1"/>
           </p:cNvSpPr>
@@ -1842,7 +1842,7 @@
       </p:sp>
       <p:sp>
         <p:nvSpPr>
-          <p:cNvPr id="2051187441" name="Notes Placeholder 2"/>
+          <p:cNvPr id="1419333329" name="Notes Placeholder 2"/>
           <p:cNvSpPr>
             <a:spLocks noGrp="1"/>
           </p:cNvSpPr>
@@ -1864,7 +1864,7 @@
       </p:sp>
       <p:sp>
         <p:nvSpPr>
-          <p:cNvPr id="1624741873" name="Slide Number Placeholder 3"/>
+          <p:cNvPr id="1167614945" name="Slide Number Placeholder 3"/>
           <p:cNvSpPr>
             <a:spLocks noGrp="1"/>
           </p:cNvSpPr>
@@ -1915,7 +1915,7 @@
       </p:grpSpPr>
       <p:sp>
         <p:nvSpPr>
-          <p:cNvPr id="742927734" name="Slide Image Placeholder 1"/>
+          <p:cNvPr id="818273836" name="Slide Image Placeholder 1"/>
           <p:cNvSpPr>
             <a:spLocks noChangeAspect="1" noGrp="1" noRot="1"/>
           </p:cNvSpPr>
@@ -1927,7 +1927,7 @@
       </p:sp>
       <p:sp>
         <p:nvSpPr>
-          <p:cNvPr id="194381623" name="Notes Placeholder 2"/>
+          <p:cNvPr id="1572241526" name="Notes Placeholder 2"/>
           <p:cNvSpPr>
             <a:spLocks noGrp="1"/>
           </p:cNvSpPr>
@@ -1949,7 +1949,7 @@
       </p:sp>
       <p:sp>
         <p:nvSpPr>
-          <p:cNvPr id="315793151" name="Slide Number Placeholder 3"/>
+          <p:cNvPr id="928264360" name="Slide Number Placeholder 3"/>
           <p:cNvSpPr>
             <a:spLocks noGrp="1"/>
           </p:cNvSpPr>
@@ -2000,7 +2000,7 @@
       </p:grpSpPr>
       <p:sp>
         <p:nvSpPr>
-          <p:cNvPr id="1557137399" name="Slide Image Placeholder 1"/>
+          <p:cNvPr id="1519161884" name="Slide Image Placeholder 1"/>
           <p:cNvSpPr>
             <a:spLocks noChangeAspect="1" noGrp="1" noRot="1"/>
           </p:cNvSpPr>
@@ -2012,7 +2012,7 @@
       </p:sp>
       <p:sp>
         <p:nvSpPr>
-          <p:cNvPr id="1838119531" name="Notes Placeholder 2"/>
+          <p:cNvPr id="1882363100" name="Notes Placeholder 2"/>
           <p:cNvSpPr>
             <a:spLocks noGrp="1"/>
           </p:cNvSpPr>
@@ -2034,7 +2034,7 @@
       </p:sp>
       <p:sp>
         <p:nvSpPr>
-          <p:cNvPr id="106328967" name="Slide Number Placeholder 3"/>
+          <p:cNvPr id="331708839" name="Slide Number Placeholder 3"/>
           <p:cNvSpPr>
             <a:spLocks noGrp="1"/>
           </p:cNvSpPr>
@@ -2085,7 +2085,7 @@
       </p:grpSpPr>
       <p:sp>
         <p:nvSpPr>
-          <p:cNvPr id="1584631599" name="Slide Image Placeholder 1"/>
+          <p:cNvPr id="1894626650" name="Slide Image Placeholder 1"/>
           <p:cNvSpPr>
             <a:spLocks noChangeAspect="1" noGrp="1" noRot="1"/>
           </p:cNvSpPr>
@@ -2097,7 +2097,7 @@
       </p:sp>
       <p:sp>
         <p:nvSpPr>
-          <p:cNvPr id="1546850056" name="Notes Placeholder 2"/>
+          <p:cNvPr id="2055250121" name="Notes Placeholder 2"/>
           <p:cNvSpPr>
             <a:spLocks noGrp="1"/>
           </p:cNvSpPr>
@@ -2119,7 +2119,7 @@
       </p:sp>
       <p:sp>
         <p:nvSpPr>
-          <p:cNvPr id="1519643393" name="Slide Number Placeholder 3"/>
+          <p:cNvPr id="806522756" name="Slide Number Placeholder 3"/>
           <p:cNvSpPr>
             <a:spLocks noGrp="1"/>
           </p:cNvSpPr>
@@ -2170,7 +2170,7 @@
       </p:grpSpPr>
       <p:sp>
         <p:nvSpPr>
-          <p:cNvPr id="539272101" name="Slide Image Placeholder 1"/>
+          <p:cNvPr id="1051393371" name="Slide Image Placeholder 1"/>
           <p:cNvSpPr>
             <a:spLocks noChangeAspect="1" noGrp="1" noRot="1"/>
           </p:cNvSpPr>
@@ -2182,7 +2182,7 @@
       </p:sp>
       <p:sp>
         <p:nvSpPr>
-          <p:cNvPr id="906988714" name="Notes Placeholder 2"/>
+          <p:cNvPr id="1219913846" name="Notes Placeholder 2"/>
           <p:cNvSpPr>
             <a:spLocks noGrp="1"/>
           </p:cNvSpPr>
@@ -2204,7 +2204,7 @@
       </p:sp>
       <p:sp>
         <p:nvSpPr>
-          <p:cNvPr id="668767748" name="Slide Number Placeholder 3"/>
+          <p:cNvPr id="1896107727" name="Slide Number Placeholder 3"/>
           <p:cNvSpPr>
             <a:spLocks noGrp="1"/>
           </p:cNvSpPr>
@@ -2255,7 +2255,7 @@
       </p:grpSpPr>
       <p:sp>
         <p:nvSpPr>
-          <p:cNvPr id="1994498674" name="Slide Image Placeholder 1"/>
+          <p:cNvPr id="27937462" name="Slide Image Placeholder 1"/>
           <p:cNvSpPr>
             <a:spLocks noChangeAspect="1" noGrp="1" noRot="1"/>
           </p:cNvSpPr>
@@ -2267,7 +2267,7 @@
       </p:sp>
       <p:sp>
         <p:nvSpPr>
-          <p:cNvPr id="1441895773" name="Notes Placeholder 2"/>
+          <p:cNvPr id="127426888" name="Notes Placeholder 2"/>
           <p:cNvSpPr>
             <a:spLocks noGrp="1"/>
           </p:cNvSpPr>
@@ -2289,7 +2289,7 @@
       </p:sp>
       <p:sp>
         <p:nvSpPr>
-          <p:cNvPr id="1357669327" name="Slide Number Placeholder 3"/>
+          <p:cNvPr id="302250452" name="Slide Number Placeholder 3"/>
           <p:cNvSpPr>
             <a:spLocks noGrp="1"/>
           </p:cNvSpPr>
@@ -2340,7 +2340,7 @@
       </p:grpSpPr>
       <p:sp>
         <p:nvSpPr>
-          <p:cNvPr id="344709407" name="Title 1"/>
+          <p:cNvPr id="2030421" name="Title 1"/>
           <p:cNvSpPr>
             <a:spLocks noGrp="1"/>
           </p:cNvSpPr>
@@ -2371,7 +2371,7 @@
       </p:sp>
       <p:sp>
         <p:nvSpPr>
-          <p:cNvPr id="1079370239" name="Subtitle 2"/>
+          <p:cNvPr id="1063656546" name="Subtitle 2"/>
           <p:cNvSpPr>
             <a:spLocks noGrp="1"/>
           </p:cNvSpPr>
@@ -2493,7 +2493,7 @@
       </p:sp>
       <p:sp>
         <p:nvSpPr>
-          <p:cNvPr id="2042582754" name="Date Placeholder 3"/>
+          <p:cNvPr id="365480857" name="Date Placeholder 3"/>
           <p:cNvSpPr>
             <a:spLocks noGrp="1"/>
           </p:cNvSpPr>
@@ -2519,7 +2519,7 @@
       </p:sp>
       <p:sp>
         <p:nvSpPr>
-          <p:cNvPr id="34839025" name="Footer Placeholder 4"/>
+          <p:cNvPr id="667806322" name="Footer Placeholder 4"/>
           <p:cNvSpPr>
             <a:spLocks noGrp="1"/>
           </p:cNvSpPr>
@@ -2541,7 +2541,7 @@
       </p:sp>
       <p:sp>
         <p:nvSpPr>
-          <p:cNvPr id="276133097" name="Slide Number Placeholder 5"/>
+          <p:cNvPr id="685373625" name="Slide Number Placeholder 5"/>
           <p:cNvSpPr>
             <a:spLocks noGrp="1"/>
           </p:cNvSpPr>
@@ -2592,7 +2592,7 @@
       </p:grpSpPr>
       <p:sp>
         <p:nvSpPr>
-          <p:cNvPr id="80087299" name="Title 1"/>
+          <p:cNvPr id="1176520820" name="Title 1"/>
           <p:cNvSpPr>
             <a:spLocks noGrp="1"/>
           </p:cNvSpPr>
@@ -2618,7 +2618,7 @@
       </p:sp>
       <p:sp>
         <p:nvSpPr>
-          <p:cNvPr id="1901912584" name="Vertical Text Placeholder 2"/>
+          <p:cNvPr id="1365147147" name="Vertical Text Placeholder 2"/>
           <p:cNvSpPr>
             <a:spLocks noGrp="1"/>
           </p:cNvSpPr>
@@ -2684,7 +2684,7 @@
       </p:sp>
       <p:sp>
         <p:nvSpPr>
-          <p:cNvPr id="500612393" name="Date Placeholder 3"/>
+          <p:cNvPr id="919775193" name="Date Placeholder 3"/>
           <p:cNvSpPr>
             <a:spLocks noGrp="1"/>
           </p:cNvSpPr>
@@ -2710,7 +2710,7 @@
       </p:sp>
       <p:sp>
         <p:nvSpPr>
-          <p:cNvPr id="660305048" name="Footer Placeholder 4"/>
+          <p:cNvPr id="1981956112" name="Footer Placeholder 4"/>
           <p:cNvSpPr>
             <a:spLocks noGrp="1"/>
           </p:cNvSpPr>
@@ -2732,7 +2732,7 @@
       </p:sp>
       <p:sp>
         <p:nvSpPr>
-          <p:cNvPr id="593531887" name="Slide Number Placeholder 5"/>
+          <p:cNvPr id="1671681879" name="Slide Number Placeholder 5"/>
           <p:cNvSpPr>
             <a:spLocks noGrp="1"/>
           </p:cNvSpPr>
@@ -2783,7 +2783,7 @@
       </p:grpSpPr>
       <p:sp>
         <p:nvSpPr>
-          <p:cNvPr id="1715133739" name="Vertical Title 1"/>
+          <p:cNvPr id="1459386638" name="Vertical Title 1"/>
           <p:cNvSpPr>
             <a:spLocks noGrp="1"/>
           </p:cNvSpPr>
@@ -2814,7 +2814,7 @@
       </p:sp>
       <p:sp>
         <p:nvSpPr>
-          <p:cNvPr id="444925740" name="Vertical Text Placeholder 2"/>
+          <p:cNvPr id="1908326308" name="Vertical Text Placeholder 2"/>
           <p:cNvSpPr>
             <a:spLocks noGrp="1"/>
           </p:cNvSpPr>
@@ -2885,7 +2885,7 @@
       </p:sp>
       <p:sp>
         <p:nvSpPr>
-          <p:cNvPr id="1980564883" name="Date Placeholder 3"/>
+          <p:cNvPr id="1570215105" name="Date Placeholder 3"/>
           <p:cNvSpPr>
             <a:spLocks noGrp="1"/>
           </p:cNvSpPr>
@@ -2911,7 +2911,7 @@
       </p:sp>
       <p:sp>
         <p:nvSpPr>
-          <p:cNvPr id="1777729256" name="Footer Placeholder 4"/>
+          <p:cNvPr id="638246966" name="Footer Placeholder 4"/>
           <p:cNvSpPr>
             <a:spLocks noGrp="1"/>
           </p:cNvSpPr>
@@ -2933,7 +2933,7 @@
       </p:sp>
       <p:sp>
         <p:nvSpPr>
-          <p:cNvPr id="1412658438" name="Slide Number Placeholder 5"/>
+          <p:cNvPr id="1261629365" name="Slide Number Placeholder 5"/>
           <p:cNvSpPr>
             <a:spLocks noGrp="1"/>
           </p:cNvSpPr>
@@ -2984,7 +2984,7 @@
       </p:grpSpPr>
       <p:sp>
         <p:nvSpPr>
-          <p:cNvPr id="2073952336" name="Title 1"/>
+          <p:cNvPr id="993182832" name="Title 1"/>
           <p:cNvSpPr>
             <a:spLocks noGrp="1"/>
           </p:cNvSpPr>
@@ -3010,7 +3010,7 @@
       </p:sp>
       <p:sp>
         <p:nvSpPr>
-          <p:cNvPr id="1350768302" name="Content Placeholder 2"/>
+          <p:cNvPr id="325036734" name="Content Placeholder 2"/>
           <p:cNvSpPr>
             <a:spLocks noGrp="1"/>
           </p:cNvSpPr>
@@ -3076,7 +3076,7 @@
       </p:sp>
       <p:sp>
         <p:nvSpPr>
-          <p:cNvPr id="439067542" name="Date Placeholder 3"/>
+          <p:cNvPr id="173864010" name="Date Placeholder 3"/>
           <p:cNvSpPr>
             <a:spLocks noGrp="1"/>
           </p:cNvSpPr>
@@ -3102,7 +3102,7 @@
       </p:sp>
       <p:sp>
         <p:nvSpPr>
-          <p:cNvPr id="1846776835" name="Footer Placeholder 4"/>
+          <p:cNvPr id="1441454432" name="Footer Placeholder 4"/>
           <p:cNvSpPr>
             <a:spLocks noGrp="1"/>
           </p:cNvSpPr>
@@ -3124,7 +3124,7 @@
       </p:sp>
       <p:sp>
         <p:nvSpPr>
-          <p:cNvPr id="1264093937" name="Slide Number Placeholder 5"/>
+          <p:cNvPr id="1488796437" name="Slide Number Placeholder 5"/>
           <p:cNvSpPr>
             <a:spLocks noGrp="1"/>
           </p:cNvSpPr>
@@ -3175,7 +3175,7 @@
       </p:grpSpPr>
       <p:sp>
         <p:nvSpPr>
-          <p:cNvPr id="863729064" name="Title 1"/>
+          <p:cNvPr id="1297073580" name="Title 1"/>
           <p:cNvSpPr>
             <a:spLocks noGrp="1"/>
           </p:cNvSpPr>
@@ -3210,7 +3210,7 @@
       </p:sp>
       <p:sp>
         <p:nvSpPr>
-          <p:cNvPr id="1987948957" name="Text Placeholder 2"/>
+          <p:cNvPr id="1829936437" name="Text Placeholder 2"/>
           <p:cNvSpPr>
             <a:spLocks noGrp="1"/>
           </p:cNvSpPr>
@@ -3332,7 +3332,7 @@
       </p:sp>
       <p:sp>
         <p:nvSpPr>
-          <p:cNvPr id="1439770287" name="Date Placeholder 3"/>
+          <p:cNvPr id="452729932" name="Date Placeholder 3"/>
           <p:cNvSpPr>
             <a:spLocks noGrp="1"/>
           </p:cNvSpPr>
@@ -3358,7 +3358,7 @@
       </p:sp>
       <p:sp>
         <p:nvSpPr>
-          <p:cNvPr id="26893507" name="Footer Placeholder 4"/>
+          <p:cNvPr id="819168606" name="Footer Placeholder 4"/>
           <p:cNvSpPr>
             <a:spLocks noGrp="1"/>
           </p:cNvSpPr>
@@ -3380,7 +3380,7 @@
       </p:sp>
       <p:sp>
         <p:nvSpPr>
-          <p:cNvPr id="2009423789" name="Slide Number Placeholder 5"/>
+          <p:cNvPr id="1405972412" name="Slide Number Placeholder 5"/>
           <p:cNvSpPr>
             <a:spLocks noGrp="1"/>
           </p:cNvSpPr>
@@ -3431,7 +3431,7 @@
       </p:grpSpPr>
       <p:sp>
         <p:nvSpPr>
-          <p:cNvPr id="1617228433" name="Title 1"/>
+          <p:cNvPr id="655172640" name="Title 1"/>
           <p:cNvSpPr>
             <a:spLocks noGrp="1"/>
           </p:cNvSpPr>
@@ -3457,7 +3457,7 @@
       </p:sp>
       <p:sp>
         <p:nvSpPr>
-          <p:cNvPr id="1546019524" name="Content Placeholder 2"/>
+          <p:cNvPr id="38343679" name="Content Placeholder 2"/>
           <p:cNvSpPr>
             <a:spLocks noGrp="1"/>
           </p:cNvSpPr>
@@ -3556,7 +3556,7 @@
       </p:sp>
       <p:sp>
         <p:nvSpPr>
-          <p:cNvPr id="189439418" name="Content Placeholder 3"/>
+          <p:cNvPr id="1101626296" name="Content Placeholder 3"/>
           <p:cNvSpPr>
             <a:spLocks noGrp="1"/>
           </p:cNvSpPr>
@@ -3655,7 +3655,7 @@
       </p:sp>
       <p:sp>
         <p:nvSpPr>
-          <p:cNvPr id="1282386173" name="Date Placeholder 4"/>
+          <p:cNvPr id="289355818" name="Date Placeholder 4"/>
           <p:cNvSpPr>
             <a:spLocks noGrp="1"/>
           </p:cNvSpPr>
@@ -3681,7 +3681,7 @@
       </p:sp>
       <p:sp>
         <p:nvSpPr>
-          <p:cNvPr id="1204494703" name="Footer Placeholder 5"/>
+          <p:cNvPr id="58408465" name="Footer Placeholder 5"/>
           <p:cNvSpPr>
             <a:spLocks noGrp="1"/>
           </p:cNvSpPr>
@@ -3703,7 +3703,7 @@
       </p:sp>
       <p:sp>
         <p:nvSpPr>
-          <p:cNvPr id="1533715489" name="Slide Number Placeholder 6"/>
+          <p:cNvPr id="1990860331" name="Slide Number Placeholder 6"/>
           <p:cNvSpPr>
             <a:spLocks noGrp="1"/>
           </p:cNvSpPr>
@@ -3754,7 +3754,7 @@
       </p:grpSpPr>
       <p:sp>
         <p:nvSpPr>
-          <p:cNvPr id="1941695858" name="Title 1"/>
+          <p:cNvPr id="305559709" name="Title 1"/>
           <p:cNvSpPr>
             <a:spLocks noGrp="1"/>
           </p:cNvSpPr>
@@ -3784,7 +3784,7 @@
       </p:sp>
       <p:sp>
         <p:nvSpPr>
-          <p:cNvPr id="548557555" name="Text Placeholder 2"/>
+          <p:cNvPr id="675868269" name="Text Placeholder 2"/>
           <p:cNvSpPr>
             <a:spLocks noGrp="1"/>
           </p:cNvSpPr>
@@ -3852,7 +3852,7 @@
       </p:sp>
       <p:sp>
         <p:nvSpPr>
-          <p:cNvPr id="310647959" name="Content Placeholder 3"/>
+          <p:cNvPr id="640478797" name="Content Placeholder 3"/>
           <p:cNvSpPr>
             <a:spLocks noGrp="1"/>
           </p:cNvSpPr>
@@ -3951,7 +3951,7 @@
       </p:sp>
       <p:sp>
         <p:nvSpPr>
-          <p:cNvPr id="1406045263" name="Text Placeholder 4"/>
+          <p:cNvPr id="1662071167" name="Text Placeholder 4"/>
           <p:cNvSpPr>
             <a:spLocks noGrp="1"/>
           </p:cNvSpPr>
@@ -4019,7 +4019,7 @@
       </p:sp>
       <p:sp>
         <p:nvSpPr>
-          <p:cNvPr id="551625176" name="Content Placeholder 5"/>
+          <p:cNvPr id="2048651843" name="Content Placeholder 5"/>
           <p:cNvSpPr>
             <a:spLocks noGrp="1"/>
           </p:cNvSpPr>
@@ -4118,7 +4118,7 @@
       </p:sp>
       <p:sp>
         <p:nvSpPr>
-          <p:cNvPr id="82508344" name="Date Placeholder 6"/>
+          <p:cNvPr id="1454366461" name="Date Placeholder 6"/>
           <p:cNvSpPr>
             <a:spLocks noGrp="1"/>
           </p:cNvSpPr>
@@ -4144,7 +4144,7 @@
       </p:sp>
       <p:sp>
         <p:nvSpPr>
-          <p:cNvPr id="478932251" name="Footer Placeholder 7"/>
+          <p:cNvPr id="711087822" name="Footer Placeholder 7"/>
           <p:cNvSpPr>
             <a:spLocks noGrp="1"/>
           </p:cNvSpPr>
@@ -4166,7 +4166,7 @@
       </p:sp>
       <p:sp>
         <p:nvSpPr>
-          <p:cNvPr id="1006642973" name="Slide Number Placeholder 8"/>
+          <p:cNvPr id="1742669993" name="Slide Number Placeholder 8"/>
           <p:cNvSpPr>
             <a:spLocks noGrp="1"/>
           </p:cNvSpPr>
@@ -4217,7 +4217,7 @@
       </p:grpSpPr>
       <p:sp>
         <p:nvSpPr>
-          <p:cNvPr id="1107494504" name="Title 1"/>
+          <p:cNvPr id="1170301010" name="Title 1"/>
           <p:cNvSpPr>
             <a:spLocks noGrp="1"/>
           </p:cNvSpPr>
@@ -4243,7 +4243,7 @@
       </p:sp>
       <p:sp>
         <p:nvSpPr>
-          <p:cNvPr id="1126080045" name="Date Placeholder 2"/>
+          <p:cNvPr id="1156232939" name="Date Placeholder 2"/>
           <p:cNvSpPr>
             <a:spLocks noGrp="1"/>
           </p:cNvSpPr>
@@ -4269,7 +4269,7 @@
       </p:sp>
       <p:sp>
         <p:nvSpPr>
-          <p:cNvPr id="288061742" name="Footer Placeholder 3"/>
+          <p:cNvPr id="2022216750" name="Footer Placeholder 3"/>
           <p:cNvSpPr>
             <a:spLocks noGrp="1"/>
           </p:cNvSpPr>
@@ -4291,7 +4291,7 @@
       </p:sp>
       <p:sp>
         <p:nvSpPr>
-          <p:cNvPr id="448220921" name="Slide Number Placeholder 4"/>
+          <p:cNvPr id="1126578675" name="Slide Number Placeholder 4"/>
           <p:cNvSpPr>
             <a:spLocks noGrp="1"/>
           </p:cNvSpPr>
@@ -4342,7 +4342,7 @@
       </p:grpSpPr>
       <p:sp>
         <p:nvSpPr>
-          <p:cNvPr id="1038260568" name="Date Placeholder 1"/>
+          <p:cNvPr id="981301968" name="Date Placeholder 1"/>
           <p:cNvSpPr>
             <a:spLocks noGrp="1"/>
           </p:cNvSpPr>
@@ -4368,7 +4368,7 @@
       </p:sp>
       <p:sp>
         <p:nvSpPr>
-          <p:cNvPr id="239155922" name="Footer Placeholder 2"/>
+          <p:cNvPr id="1138610935" name="Footer Placeholder 2"/>
           <p:cNvSpPr>
             <a:spLocks noGrp="1"/>
           </p:cNvSpPr>
@@ -4390,7 +4390,7 @@
       </p:sp>
       <p:sp>
         <p:nvSpPr>
-          <p:cNvPr id="1509206749" name="Slide Number Placeholder 3"/>
+          <p:cNvPr id="1470695944" name="Slide Number Placeholder 3"/>
           <p:cNvSpPr>
             <a:spLocks noGrp="1"/>
           </p:cNvSpPr>
@@ -4441,7 +4441,7 @@
       </p:grpSpPr>
       <p:sp>
         <p:nvSpPr>
-          <p:cNvPr id="1940698801" name="Title 1"/>
+          <p:cNvPr id="1908118581" name="Title 1"/>
           <p:cNvSpPr>
             <a:spLocks noGrp="1"/>
           </p:cNvSpPr>
@@ -4476,7 +4476,7 @@
       </p:sp>
       <p:sp>
         <p:nvSpPr>
-          <p:cNvPr id="244351976" name="Content Placeholder 2"/>
+          <p:cNvPr id="1566917019" name="Content Placeholder 2"/>
           <p:cNvSpPr>
             <a:spLocks noGrp="1"/>
           </p:cNvSpPr>
@@ -4575,7 +4575,7 @@
       </p:sp>
       <p:sp>
         <p:nvSpPr>
-          <p:cNvPr id="1784421828" name="Text Placeholder 3"/>
+          <p:cNvPr id="391513524" name="Text Placeholder 3"/>
           <p:cNvSpPr>
             <a:spLocks noGrp="1"/>
           </p:cNvSpPr>
@@ -4643,7 +4643,7 @@
       </p:sp>
       <p:sp>
         <p:nvSpPr>
-          <p:cNvPr id="520139561" name="Date Placeholder 4"/>
+          <p:cNvPr id="743805170" name="Date Placeholder 4"/>
           <p:cNvSpPr>
             <a:spLocks noGrp="1"/>
           </p:cNvSpPr>
@@ -4669,7 +4669,7 @@
       </p:sp>
       <p:sp>
         <p:nvSpPr>
-          <p:cNvPr id="180224315" name="Footer Placeholder 5"/>
+          <p:cNvPr id="121626960" name="Footer Placeholder 5"/>
           <p:cNvSpPr>
             <a:spLocks noGrp="1"/>
           </p:cNvSpPr>
@@ -4691,7 +4691,7 @@
       </p:sp>
       <p:sp>
         <p:nvSpPr>
-          <p:cNvPr id="28508163" name="Slide Number Placeholder 6"/>
+          <p:cNvPr id="978201204" name="Slide Number Placeholder 6"/>
           <p:cNvSpPr>
             <a:spLocks noGrp="1"/>
           </p:cNvSpPr>
@@ -4742,7 +4742,7 @@
       </p:grpSpPr>
       <p:sp>
         <p:nvSpPr>
-          <p:cNvPr id="1134624494" name="Title 1"/>
+          <p:cNvPr id="1746596087" name="Title 1"/>
           <p:cNvSpPr>
             <a:spLocks noGrp="1"/>
           </p:cNvSpPr>
@@ -4777,7 +4777,7 @@
       </p:sp>
       <p:sp>
         <p:nvSpPr>
-          <p:cNvPr id="1661686413" name="Picture Placeholder 2"/>
+          <p:cNvPr id="1256442352" name="Picture Placeholder 2"/>
           <p:cNvSpPr>
             <a:spLocks noGrp="1"/>
           </p:cNvSpPr>
@@ -4841,7 +4841,7 @@
       </p:sp>
       <p:sp>
         <p:nvSpPr>
-          <p:cNvPr id="589843537" name="Text Placeholder 3"/>
+          <p:cNvPr id="726361962" name="Text Placeholder 3"/>
           <p:cNvSpPr>
             <a:spLocks noGrp="1"/>
           </p:cNvSpPr>
@@ -4909,7 +4909,7 @@
       </p:sp>
       <p:sp>
         <p:nvSpPr>
-          <p:cNvPr id="869631009" name="Date Placeholder 4"/>
+          <p:cNvPr id="1380345073" name="Date Placeholder 4"/>
           <p:cNvSpPr>
             <a:spLocks noGrp="1"/>
           </p:cNvSpPr>
@@ -4935,7 +4935,7 @@
       </p:sp>
       <p:sp>
         <p:nvSpPr>
-          <p:cNvPr id="1716725439" name="Footer Placeholder 5"/>
+          <p:cNvPr id="2084430524" name="Footer Placeholder 5"/>
           <p:cNvSpPr>
             <a:spLocks noGrp="1"/>
           </p:cNvSpPr>
@@ -4957,7 +4957,7 @@
       </p:sp>
       <p:sp>
         <p:nvSpPr>
-          <p:cNvPr id="118650858" name="Slide Number Placeholder 6"/>
+          <p:cNvPr id="77133385" name="Slide Number Placeholder 6"/>
           <p:cNvSpPr>
             <a:spLocks noGrp="1"/>
           </p:cNvSpPr>
@@ -5013,7 +5013,7 @@
       </p:grpSpPr>
       <p:sp>
         <p:nvSpPr>
-          <p:cNvPr id="1468143634" name="Title Placeholder 1"/>
+          <p:cNvPr id="2090568143" name="Title Placeholder 1"/>
           <p:cNvSpPr>
             <a:spLocks noGrp="1"/>
           </p:cNvSpPr>
@@ -5049,7 +5049,7 @@
       </p:sp>
       <p:sp>
         <p:nvSpPr>
-          <p:cNvPr id="1967627769" name="Text Placeholder 2"/>
+          <p:cNvPr id="1372948889" name="Text Placeholder 2"/>
           <p:cNvSpPr>
             <a:spLocks noGrp="1"/>
           </p:cNvSpPr>
@@ -5125,7 +5125,7 @@
       </p:sp>
       <p:sp>
         <p:nvSpPr>
-          <p:cNvPr id="233855359" name="Date Placeholder 3"/>
+          <p:cNvPr id="471549706" name="Date Placeholder 3"/>
           <p:cNvSpPr>
             <a:spLocks noGrp="1"/>
           </p:cNvSpPr>
@@ -5169,7 +5169,7 @@
       </p:sp>
       <p:sp>
         <p:nvSpPr>
-          <p:cNvPr id="907949284" name="Footer Placeholder 4"/>
+          <p:cNvPr id="1095061940" name="Footer Placeholder 4"/>
           <p:cNvSpPr>
             <a:spLocks noGrp="1"/>
           </p:cNvSpPr>
@@ -5209,7 +5209,7 @@
       </p:sp>
       <p:sp>
         <p:nvSpPr>
-          <p:cNvPr id="1372035254" name="Slide Number Placeholder 5"/>
+          <p:cNvPr id="1827318340" name="Slide Number Placeholder 5"/>
           <p:cNvSpPr>
             <a:spLocks noGrp="1"/>
           </p:cNvSpPr>
@@ -5523,6 +5523,13 @@
 <file path=ppt/slides/slide1.xml><?xml version="1.0" encoding="utf-8"?>
 <p:sld xmlns:a="http://schemas.openxmlformats.org/drawingml/2006/main" xmlns:r="http://schemas.openxmlformats.org/officeDocument/2006/relationships" xmlns:p="http://schemas.openxmlformats.org/presentationml/2006/main" xmlns:m="http://schemas.openxmlformats.org/officeDocument/2006/math" xmlns:w="http://schemas.openxmlformats.org/wordprocessingml/2006/main" xmlns:mc="http://schemas.openxmlformats.org/markup-compatibility/2006" showMasterPhAnim="0" showMasterSp="1" show="1">
   <p:cSld name="">
+    <p:bg>
+      <p:bgPr shadeToTitle="0">
+        <a:solidFill>
+          <a:schemeClr val="tx1"/>
+        </a:solidFill>
+      </p:bgPr>
+    </p:bg>
     <p:spTree>
       <p:nvGrpSpPr>
         <p:cNvPr id="1" name=""/>
@@ -5539,7 +5546,7 @@
       </p:grpSpPr>
       <p:sp>
         <p:nvSpPr>
-          <p:cNvPr id="1546518221" name="Rectangle 1"/>
+          <p:cNvPr id="1264790579" name="Rectangle 1"/>
           <p:cNvSpPr/>
           <p:nvPr/>
         </p:nvSpPr>
@@ -5552,7 +5559,7 @@
             <a:avLst/>
           </a:prstGeom>
           <a:solidFill>
-            <a:srgbClr val="0F172A"/>
+            <a:schemeClr val="bg1"/>
           </a:solidFill>
           <a:ln>
             <a:noFill/>
@@ -5586,7 +5593,7 @@
       </p:sp>
       <p:sp>
         <p:nvSpPr>
-          <p:cNvPr id="553299844" name="Rectangle 2"/>
+          <p:cNvPr id="717357919" name="Rectangle 2"/>
           <p:cNvSpPr/>
           <p:nvPr/>
         </p:nvSpPr>
@@ -5633,7 +5640,7 @@
       </p:sp>
       <p:sp>
         <p:nvSpPr>
-          <p:cNvPr id="962288433" name="Rectangle 3"/>
+          <p:cNvPr id="1303402749" name="Rectangle 3"/>
           <p:cNvSpPr/>
           <p:nvPr/>
         </p:nvSpPr>
@@ -5680,14 +5687,14 @@
       </p:sp>
       <p:sp>
         <p:nvSpPr>
-          <p:cNvPr id="1043074100" name="TextBox 4"/>
+          <p:cNvPr id="2053142427" name="TextBox 4"/>
           <p:cNvSpPr txBox="1"/>
           <p:nvPr/>
         </p:nvSpPr>
         <p:spPr bwMode="auto">
           <a:xfrm>
             <a:off x="914400" y="640080"/>
-            <a:ext cx="10362895" cy="1097280"/>
+            <a:ext cx="10402854" cy="677015"/>
           </a:xfrm>
           <a:prstGeom prst="rect">
             <a:avLst/>
@@ -5704,58 +5711,77 @@
               <a:defRPr/>
             </a:pPr>
             <a:r>
-              <a:rPr sz="1300" b="0" i="0">
-                <a:solidFill>
-                  <a:srgbClr val="94A3B8"/>
-                </a:solidFill>
-                <a:latin typeface="Segoe UI"/>
-              </a:rPr>
-              <a:t>Минобрнауки России</a:t>
-            </a:r>
-            <a:endParaRPr/>
-          </a:p>
-          <a:p>
-            <a:pPr algn="ctr">
-              <a:defRPr/>
-            </a:pPr>
-            <a:r>
-              <a:rPr sz="1400" b="1" i="0">
-                <a:solidFill>
-                  <a:srgbClr val="FFFFFF"/>
-                </a:solidFill>
-                <a:latin typeface="Segoe UI"/>
-              </a:rPr>
-              <a:t>ФГАОУ ВО «Северо-Кавказский федеральный университет»</a:t>
-            </a:r>
-            <a:endParaRPr/>
-          </a:p>
-          <a:p>
-            <a:pPr algn="ctr">
-              <a:defRPr/>
-            </a:pPr>
-            <a:r>
-              <a:rPr sz="1300" b="0" i="0">
-                <a:solidFill>
-                  <a:srgbClr val="94A3B8"/>
-                </a:solidFill>
-                <a:latin typeface="Segoe UI"/>
-              </a:rPr>
-              <a:t>Институт перспективной инженерии</a:t>
-            </a:r>
-            <a:endParaRPr/>
-          </a:p>
-        </p:txBody>
-      </p:sp>
-      <p:sp>
-        <p:nvSpPr>
-          <p:cNvPr id="1697654357" name="TextBox 5"/>
+              <a:rPr lang="ru-RU" sz="1400" b="1" i="0">
+                <a:solidFill>
+                  <a:schemeClr val="tx1"/>
+                </a:solidFill>
+                <a:latin typeface="Segoe UI"/>
+              </a:rPr>
+              <a:t>Северо-Кавказский федеральный университет</a:t>
+            </a:r>
+            <a:br>
+              <a:rPr lang="ru-RU" sz="1400" b="1" i="0">
+                <a:solidFill>
+                  <a:schemeClr val="tx1"/>
+                </a:solidFill>
+                <a:latin typeface="Segoe UI"/>
+              </a:rPr>
+            </a:br>
+            <a:r>
+              <a:rPr lang="ru-RU" sz="1400" b="1" i="0">
+                <a:solidFill>
+                  <a:schemeClr val="tx1"/>
+                </a:solidFill>
+                <a:latin typeface="Segoe UI"/>
+              </a:rPr>
+              <a:t>Институ</a:t>
+            </a:r>
+            <a:r>
+              <a:rPr lang="ru-RU" sz="1400" b="1" i="0">
+                <a:solidFill>
+                  <a:schemeClr val="tx1"/>
+                </a:solidFill>
+                <a:latin typeface="Segoe UI"/>
+              </a:rPr>
+              <a:t>т перспективной инженерии</a:t>
+            </a:r>
+            <a:br>
+              <a:rPr lang="ru-RU" sz="1400" b="1" i="0">
+                <a:solidFill>
+                  <a:schemeClr val="tx1"/>
+                </a:solidFill>
+                <a:latin typeface="Segoe UI"/>
+              </a:rPr>
+            </a:br>
+            <a:r>
+              <a:rPr lang="ru-RU" sz="1400" b="1" i="0" u="none" strike="noStrike" cap="none" spc="0">
+                <a:solidFill>
+                  <a:schemeClr val="tx1"/>
+                </a:solidFill>
+                <a:latin typeface="Segoe UI"/>
+                <a:ea typeface="Segoe UI"/>
+                <a:cs typeface="Segoe UI"/>
+              </a:rPr>
+              <a:t>Департамент цифровых, робототехнических систем и электроники</a:t>
+            </a:r>
+            <a:endParaRPr sz="1400" b="1">
+              <a:solidFill>
+                <a:srgbClr val="334155"/>
+              </a:solidFill>
+            </a:endParaRPr>
+          </a:p>
+        </p:txBody>
+      </p:sp>
+      <p:sp>
+        <p:nvSpPr>
+          <p:cNvPr id="558205663" name="TextBox 5"/>
           <p:cNvSpPr txBox="1"/>
           <p:nvPr/>
         </p:nvSpPr>
         <p:spPr bwMode="auto">
           <a:xfrm>
-            <a:off x="822960" y="2286000"/>
-            <a:ext cx="10545775" cy="1554480"/>
+            <a:off x="822960" y="2359331"/>
+            <a:ext cx="10546494" cy="1408535"/>
           </a:xfrm>
           <a:prstGeom prst="rect">
             <a:avLst/>
@@ -5789,7 +5815,7 @@
             <a:r>
               <a:rPr sz="3000" b="1" i="0">
                 <a:solidFill>
-                  <a:srgbClr val="FFFFFF"/>
+                  <a:schemeClr val="tx1"/>
                 </a:solidFill>
                 <a:latin typeface="Segoe UI"/>
               </a:rPr>
@@ -5798,7 +5824,7 @@
             <a:br>
               <a:rPr sz="3000" b="1" i="0">
                 <a:solidFill>
-                  <a:srgbClr val="FFFFFF"/>
+                  <a:schemeClr val="tx1"/>
                 </a:solidFill>
                 <a:latin typeface="Segoe UI"/>
               </a:rPr>
@@ -5806,13 +5832,17 @@
             <a:r>
               <a:rPr sz="3000" b="1" i="0">
                 <a:solidFill>
-                  <a:srgbClr val="FFFFFF"/>
+                  <a:schemeClr val="tx1"/>
                 </a:solidFill>
                 <a:latin typeface="Segoe UI"/>
               </a:rPr>
               <a:t>личного файлового хранилища</a:t>
             </a:r>
-            <a:endParaRPr/>
+            <a:endParaRPr>
+              <a:solidFill>
+                <a:schemeClr val="tx1"/>
+              </a:solidFill>
+            </a:endParaRPr>
           </a:p>
           <a:p>
             <a:pPr algn="ctr">
@@ -5821,26 +5851,30 @@
             <a:r>
               <a:rPr sz="1600" b="0" i="1">
                 <a:solidFill>
-                  <a:srgbClr val="CBD5E1"/>
+                  <a:srgbClr val="334155"/>
                 </a:solidFill>
                 <a:latin typeface="Segoe UI"/>
               </a:rPr>
               <a:t>LocalCloud — self-hosted облачное хранилище</a:t>
             </a:r>
-            <a:endParaRPr/>
-          </a:p>
-        </p:txBody>
-      </p:sp>
-      <p:sp>
-        <p:nvSpPr>
-          <p:cNvPr id="1881627634" name="TextBox 6"/>
+            <a:endParaRPr>
+              <a:solidFill>
+                <a:srgbClr val="334155"/>
+              </a:solidFill>
+            </a:endParaRPr>
+          </a:p>
+        </p:txBody>
+      </p:sp>
+      <p:sp>
+        <p:nvSpPr>
+          <p:cNvPr id="582973641" name="TextBox 6"/>
           <p:cNvSpPr txBox="1"/>
           <p:nvPr/>
         </p:nvSpPr>
         <p:spPr bwMode="auto">
-          <a:xfrm>
-            <a:off x="1280160" y="4480560"/>
-            <a:ext cx="9631375" cy="1554480"/>
+          <a:xfrm flipH="0" flipV="0">
+            <a:off x="822960" y="4480559"/>
+            <a:ext cx="10865137" cy="1362815"/>
           </a:xfrm>
           <a:prstGeom prst="rect">
             <a:avLst/>
@@ -5856,55 +5890,139 @@
             <a:pPr>
               <a:defRPr/>
             </a:pPr>
-            <a:endParaRPr/>
-          </a:p>
-          <a:p>
-            <a:pPr>
-              <a:defRPr/>
-            </a:pPr>
             <a:r>
               <a:rPr sz="1400" b="0" i="0">
                 <a:solidFill>
+                  <a:srgbClr val="334155"/>
+                </a:solidFill>
+                <a:latin typeface="Segoe UI"/>
+              </a:rPr>
+              <a:t>Выполнил:</a:t>
+            </a:r>
+            <a:r>
+              <a:rPr sz="1400" b="0" i="0">
+                <a:solidFill>
                   <a:srgbClr val="94A3B8"/>
                 </a:solidFill>
                 <a:latin typeface="Segoe UI"/>
               </a:rPr>
-              <a:t>Выполнил:  </a:t>
+              <a:t>  </a:t>
             </a:r>
             <a:r>
               <a:rPr sz="1400" b="1" i="0">
                 <a:solidFill>
-                  <a:srgbClr val="FFFFFF"/>
-                </a:solidFill>
-                <a:latin typeface="Segoe UI"/>
-              </a:rPr>
-              <a:t>Магомедов Имран Борисович, гр. ПИЖ-б-о-22-1</a:t>
-            </a:r>
-            <a:endParaRPr/>
-          </a:p>
-          <a:p>
-            <a:pPr>
-              <a:defRPr/>
-            </a:pPr>
+                  <a:schemeClr val="tx1"/>
+                </a:solidFill>
+                <a:latin typeface="Segoe UI"/>
+              </a:rPr>
+              <a:t>Магомедов Имран Борисович</a:t>
+            </a:r>
+            <a:endParaRPr>
+              <a:solidFill>
+                <a:schemeClr val="tx1"/>
+              </a:solidFill>
+            </a:endParaRPr>
+          </a:p>
+          <a:p>
+            <a:pPr>
+              <a:defRPr/>
+            </a:pPr>
+            <a:r>
+              <a:rPr lang="ru-RU" sz="1400">
+                <a:solidFill>
+                  <a:srgbClr val="334155"/>
+                </a:solidFill>
+                <a:latin typeface="Segoe UI"/>
+                <a:ea typeface="Segoe UI"/>
+                <a:cs typeface="Segoe UI"/>
+              </a:rPr>
+              <a:t>Группа</a:t>
+            </a:r>
+            <a:r>
+              <a:rPr lang="en-US" sz="1400">
+                <a:solidFill>
+                  <a:srgbClr val="334155"/>
+                </a:solidFill>
+                <a:latin typeface="Segoe UI"/>
+                <a:ea typeface="Segoe UI"/>
+                <a:cs typeface="Segoe UI"/>
+              </a:rPr>
+              <a:t>:</a:t>
+            </a:r>
+            <a:r>
+              <a:rPr lang="en-US" sz="1400">
+                <a:solidFill>
+                  <a:srgbClr val="334155"/>
+                </a:solidFill>
+                <a:latin typeface="Standard Symbols PS"/>
+                <a:ea typeface="Standard Symbols PS"/>
+                <a:cs typeface="Standard Symbols PS"/>
+              </a:rPr>
+              <a:t> </a:t>
+            </a:r>
+            <a:r>
+              <a:rPr lang="en-US" sz="1400" b="1" i="0" u="none" strike="noStrike" cap="none" spc="0">
+                <a:solidFill>
+                  <a:schemeClr val="tx1"/>
+                </a:solidFill>
+                <a:latin typeface="Segoe UI"/>
+                <a:ea typeface="Segoe UI"/>
+                <a:cs typeface="Segoe UI"/>
+              </a:rPr>
+              <a:t>ПИЖ-б-о-22-1</a:t>
+            </a:r>
+            <a:endParaRPr sz="1400" b="1" i="0">
+              <a:solidFill>
+                <a:schemeClr val="tx1"/>
+              </a:solidFill>
+              <a:latin typeface="Segoe UI"/>
+            </a:endParaRPr>
+          </a:p>
+          <a:p>
+            <a:pPr>
+              <a:defRPr/>
+            </a:pPr>
+            <a:r>
+              <a:rPr lang="ru-RU" sz="1400" b="0" i="0">
+                <a:solidFill>
+                  <a:srgbClr val="334155"/>
+                </a:solidFill>
+                <a:latin typeface="Segoe UI"/>
+              </a:rPr>
+              <a:t>Специальность</a:t>
+            </a:r>
             <a:r>
               <a:rPr sz="1400" b="0" i="0">
                 <a:solidFill>
+                  <a:srgbClr val="334155"/>
+                </a:solidFill>
+                <a:latin typeface="Segoe UI"/>
+              </a:rPr>
+              <a:t>:</a:t>
+            </a:r>
+            <a:r>
+              <a:rPr sz="1400" b="0" i="0">
+                <a:solidFill>
                   <a:srgbClr val="94A3B8"/>
                 </a:solidFill>
                 <a:latin typeface="Segoe UI"/>
               </a:rPr>
-              <a:t>Направление:  </a:t>
+              <a:t>  </a:t>
             </a:r>
             <a:r>
               <a:rPr sz="1400" b="1" i="0">
                 <a:solidFill>
-                  <a:srgbClr val="FFFFFF"/>
+                  <a:schemeClr val="tx1"/>
                 </a:solidFill>
                 <a:latin typeface="Segoe UI"/>
               </a:rPr>
               <a:t>09.03.04 Программная инженерия</a:t>
             </a:r>
-            <a:endParaRPr/>
+            <a:endParaRPr>
+              <a:solidFill>
+                <a:schemeClr val="tx1"/>
+              </a:solidFill>
+            </a:endParaRPr>
           </a:p>
           <a:p>
             <a:pPr>
@@ -5913,43 +6031,80 @@
             <a:r>
               <a:rPr sz="1400" b="0" i="0">
                 <a:solidFill>
+                  <a:srgbClr val="334155"/>
+                </a:solidFill>
+                <a:latin typeface="Segoe UI"/>
+              </a:rPr>
+              <a:t>Руководитель:</a:t>
+            </a:r>
+            <a:r>
+              <a:rPr sz="1400" b="0" i="0">
+                <a:solidFill>
                   <a:srgbClr val="94A3B8"/>
                 </a:solidFill>
                 <a:latin typeface="Segoe UI"/>
               </a:rPr>
-              <a:t>Руководитель:  </a:t>
-            </a:r>
-            <a:r>
-              <a:rPr sz="1400" b="1" i="0">
-                <a:solidFill>
-                  <a:srgbClr val="FFFFFF"/>
-                </a:solidFill>
-                <a:latin typeface="Segoe UI"/>
-              </a:rPr>
-              <a:t>к.т.н., доцент Самойлов Ф. В.</a:t>
-            </a:r>
-            <a:endParaRPr/>
+              <a:t>  </a:t>
+            </a:r>
+            <a:r>
+              <a:rPr lang="ru-RU" sz="1400" b="1" i="0" u="none" strike="noStrike" cap="none" spc="0">
+                <a:solidFill>
+                  <a:schemeClr val="tx1"/>
+                </a:solidFill>
+                <a:latin typeface="Segoe UI"/>
+                <a:ea typeface="Segoe UI"/>
+                <a:cs typeface="Segoe UI"/>
+              </a:rPr>
+              <a:t>д</a:t>
+            </a:r>
+            <a:r>
+              <a:rPr lang="en-US" sz="1400" b="1" i="0" u="none" strike="noStrike" cap="none" spc="0">
+                <a:solidFill>
+                  <a:schemeClr val="tx1"/>
+                </a:solidFill>
+                <a:latin typeface="Segoe UI"/>
+                <a:ea typeface="Segoe UI"/>
+                <a:cs typeface="Segoe UI"/>
+              </a:rPr>
+              <a:t>оцент, кандидат технических наук Самойлов Филипп Владимирович</a:t>
+            </a:r>
+            <a:endParaRPr>
+              <a:solidFill>
+                <a:schemeClr val="tx1"/>
+              </a:solidFill>
+            </a:endParaRPr>
           </a:p>
           <a:p>
             <a:pPr algn="l">
               <a:defRPr/>
             </a:pPr>
+            <a:endParaRPr/>
+          </a:p>
+          <a:p>
+            <a:pPr algn="ctr">
+              <a:defRPr/>
+            </a:pPr>
             <a:r>
               <a:rPr sz="1300" b="0" i="0">
                 <a:solidFill>
-                  <a:srgbClr val="94A3B8"/>
+                  <a:srgbClr val="334155"/>
                 </a:solidFill>
                 <a:latin typeface="Segoe UI"/>
               </a:rPr>
               <a:t>Ставрополь, 2026</a:t>
             </a:r>
-            <a:endParaRPr/>
+            <a:endParaRPr sz="1300" b="0" i="0">
+              <a:solidFill>
+                <a:srgbClr val="334155"/>
+              </a:solidFill>
+              <a:latin typeface="Segoe UI"/>
+            </a:endParaRPr>
           </a:p>
         </p:txBody>
       </p:sp>
       <p:pic>
         <p:nvPicPr>
-          <p:cNvPr id="1928057316" name=""/>
+          <p:cNvPr id="1641005896" name=""/>
           <p:cNvPicPr>
             <a:picLocks noChangeAspect="1"/>
           </p:cNvPicPr>
@@ -6010,7 +6165,7 @@
       </p:grpSpPr>
       <p:sp>
         <p:nvSpPr>
-          <p:cNvPr id="1518183431" name="Rectangle 1"/>
+          <p:cNvPr id="1558010007" name="Rectangle 1"/>
           <p:cNvSpPr/>
           <p:nvPr/>
         </p:nvSpPr>
@@ -6057,7 +6212,7 @@
       </p:sp>
       <p:sp>
         <p:nvSpPr>
-          <p:cNvPr id="1121228018" name="TextBox 2"/>
+          <p:cNvPr id="1393713528" name="TextBox 2"/>
           <p:cNvSpPr txBox="1"/>
           <p:nvPr/>
         </p:nvSpPr>
@@ -6110,7 +6265,7 @@
       </p:sp>
       <p:sp>
         <p:nvSpPr>
-          <p:cNvPr id="125457328" name="Rectangle 3"/>
+          <p:cNvPr id="1508407644" name="Rectangle 3"/>
           <p:cNvSpPr/>
           <p:nvPr/>
         </p:nvSpPr>
@@ -6157,7 +6312,7 @@
       </p:sp>
       <p:sp>
         <p:nvSpPr>
-          <p:cNvPr id="2065953153" name="TextBox 4"/>
+          <p:cNvPr id="300102338" name="TextBox 4"/>
           <p:cNvSpPr txBox="1"/>
           <p:nvPr/>
         </p:nvSpPr>
@@ -6195,7 +6350,7 @@
       </p:sp>
       <p:sp>
         <p:nvSpPr>
-          <p:cNvPr id="662093568" name="TextBox 5"/>
+          <p:cNvPr id="1113230965" name="TextBox 5"/>
           <p:cNvSpPr txBox="1"/>
           <p:nvPr/>
         </p:nvSpPr>
@@ -6233,7 +6388,7 @@
       </p:sp>
       <p:sp>
         <p:nvSpPr>
-          <p:cNvPr id="664052208" name="TextBox 6"/>
+          <p:cNvPr id="1154290935" name="TextBox 6"/>
           <p:cNvSpPr txBox="1"/>
           <p:nvPr/>
         </p:nvSpPr>
@@ -6427,7 +6582,7 @@
       </p:sp>
       <p:pic>
         <p:nvPicPr>
-          <p:cNvPr id="2020013744" name="Picture 7" descr="er.png"/>
+          <p:cNvPr id="1867283529" name="Picture 7" descr="er.png"/>
           <p:cNvPicPr>
             <a:picLocks noChangeAspect="1"/>
           </p:cNvPicPr>
@@ -6449,7 +6604,7 @@
       </p:pic>
       <p:sp>
         <p:nvSpPr>
-          <p:cNvPr id="1489147378" name="TextBox 8"/>
+          <p:cNvPr id="1579908682" name="TextBox 8"/>
           <p:cNvSpPr txBox="1"/>
           <p:nvPr/>
         </p:nvSpPr>
@@ -6487,7 +6642,7 @@
       </p:sp>
       <p:pic>
         <p:nvPicPr>
-          <p:cNvPr id="541577070" name=""/>
+          <p:cNvPr id="1878940865" name=""/>
           <p:cNvPicPr>
             <a:picLocks noChangeAspect="1"/>
           </p:cNvPicPr>
@@ -6542,7 +6697,7 @@
       </p:grpSpPr>
       <p:sp>
         <p:nvSpPr>
-          <p:cNvPr id="1734012204" name="Rectangle 1"/>
+          <p:cNvPr id="240677036" name="Rectangle 1"/>
           <p:cNvSpPr/>
           <p:nvPr/>
         </p:nvSpPr>
@@ -6589,7 +6744,7 @@
       </p:sp>
       <p:sp>
         <p:nvSpPr>
-          <p:cNvPr id="500192304" name="TextBox 2"/>
+          <p:cNvPr id="2044472587" name="TextBox 2"/>
           <p:cNvSpPr txBox="1"/>
           <p:nvPr/>
         </p:nvSpPr>
@@ -6642,7 +6797,7 @@
       </p:sp>
       <p:sp>
         <p:nvSpPr>
-          <p:cNvPr id="984881331" name="Rectangle 3"/>
+          <p:cNvPr id="1719062899" name="Rectangle 3"/>
           <p:cNvSpPr/>
           <p:nvPr/>
         </p:nvSpPr>
@@ -6689,7 +6844,7 @@
       </p:sp>
       <p:sp>
         <p:nvSpPr>
-          <p:cNvPr id="932767843" name="TextBox 4"/>
+          <p:cNvPr id="1881563746" name="TextBox 4"/>
           <p:cNvSpPr txBox="1"/>
           <p:nvPr/>
         </p:nvSpPr>
@@ -6727,7 +6882,7 @@
       </p:sp>
       <p:sp>
         <p:nvSpPr>
-          <p:cNvPr id="863967140" name="TextBox 5"/>
+          <p:cNvPr id="596138145" name="TextBox 5"/>
           <p:cNvSpPr txBox="1"/>
           <p:nvPr/>
         </p:nvSpPr>
@@ -6765,7 +6920,7 @@
       </p:sp>
       <p:sp>
         <p:nvSpPr>
-          <p:cNvPr id="290320283" name="Rectangle 6"/>
+          <p:cNvPr id="293547003" name="Rectangle 6"/>
           <p:cNvSpPr/>
           <p:nvPr/>
         </p:nvSpPr>
@@ -6812,7 +6967,7 @@
       </p:sp>
       <p:sp>
         <p:nvSpPr>
-          <p:cNvPr id="777749384" name="TextBox 7"/>
+          <p:cNvPr id="1248278799" name="TextBox 7"/>
           <p:cNvSpPr txBox="1"/>
           <p:nvPr/>
         </p:nvSpPr>
@@ -6850,7 +7005,7 @@
       </p:sp>
       <p:sp>
         <p:nvSpPr>
-          <p:cNvPr id="1802814292" name="Rectangle 8"/>
+          <p:cNvPr id="1103859792" name="Rectangle 8"/>
           <p:cNvSpPr/>
           <p:nvPr/>
         </p:nvSpPr>
@@ -7028,7 +7183,7 @@
       </p:sp>
       <p:sp>
         <p:nvSpPr>
-          <p:cNvPr id="1796330643" name="Rectangle 9"/>
+          <p:cNvPr id="1763640744" name="Rectangle 9"/>
           <p:cNvSpPr/>
           <p:nvPr/>
         </p:nvSpPr>
@@ -7075,7 +7230,7 @@
       </p:sp>
       <p:sp>
         <p:nvSpPr>
-          <p:cNvPr id="322558808" name="TextBox 10"/>
+          <p:cNvPr id="337724147" name="TextBox 10"/>
           <p:cNvSpPr txBox="1"/>
           <p:nvPr/>
         </p:nvSpPr>
@@ -7113,7 +7268,7 @@
       </p:sp>
       <p:sp>
         <p:nvSpPr>
-          <p:cNvPr id="2093007302" name="Rectangle 11"/>
+          <p:cNvPr id="1360463866" name="Rectangle 11"/>
           <p:cNvSpPr/>
           <p:nvPr/>
         </p:nvSpPr>
@@ -7291,7 +7446,7 @@
       </p:sp>
       <p:sp>
         <p:nvSpPr>
-          <p:cNvPr id="1163747463" name="Rectangle 12"/>
+          <p:cNvPr id="483335810" name="Rectangle 12"/>
           <p:cNvSpPr/>
           <p:nvPr/>
         </p:nvSpPr>
@@ -7338,7 +7493,7 @@
       </p:sp>
       <p:sp>
         <p:nvSpPr>
-          <p:cNvPr id="2123468178" name="TextBox 13"/>
+          <p:cNvPr id="2047782834" name="TextBox 13"/>
           <p:cNvSpPr txBox="1"/>
           <p:nvPr/>
         </p:nvSpPr>
@@ -7376,7 +7531,7 @@
       </p:sp>
       <p:sp>
         <p:nvSpPr>
-          <p:cNvPr id="1471981" name="Rectangle 14"/>
+          <p:cNvPr id="535667388" name="Rectangle 14"/>
           <p:cNvSpPr/>
           <p:nvPr/>
         </p:nvSpPr>
@@ -7554,7 +7709,7 @@
       </p:sp>
       <p:pic>
         <p:nvPicPr>
-          <p:cNvPr id="340683797" name=""/>
+          <p:cNvPr id="276442202" name=""/>
           <p:cNvPicPr>
             <a:picLocks noChangeAspect="1"/>
           </p:cNvPicPr>
@@ -7609,7 +7764,7 @@
       </p:grpSpPr>
       <p:sp>
         <p:nvSpPr>
-          <p:cNvPr id="502689597" name="Rectangle 1"/>
+          <p:cNvPr id="583543152" name="Rectangle 1"/>
           <p:cNvSpPr/>
           <p:nvPr/>
         </p:nvSpPr>
@@ -7656,7 +7811,7 @@
       </p:sp>
       <p:sp>
         <p:nvSpPr>
-          <p:cNvPr id="1763569965" name="TextBox 2"/>
+          <p:cNvPr id="1364761557" name="TextBox 2"/>
           <p:cNvSpPr txBox="1"/>
           <p:nvPr/>
         </p:nvSpPr>
@@ -7709,7 +7864,7 @@
       </p:sp>
       <p:sp>
         <p:nvSpPr>
-          <p:cNvPr id="1518191844" name="Rectangle 3"/>
+          <p:cNvPr id="1578024754" name="Rectangle 3"/>
           <p:cNvSpPr/>
           <p:nvPr/>
         </p:nvSpPr>
@@ -7756,7 +7911,7 @@
       </p:sp>
       <p:sp>
         <p:nvSpPr>
-          <p:cNvPr id="1484475098" name="TextBox 4"/>
+          <p:cNvPr id="925476507" name="TextBox 4"/>
           <p:cNvSpPr txBox="1"/>
           <p:nvPr/>
         </p:nvSpPr>
@@ -7794,7 +7949,7 @@
       </p:sp>
       <p:sp>
         <p:nvSpPr>
-          <p:cNvPr id="1332488524" name="TextBox 5"/>
+          <p:cNvPr id="1797846834" name="TextBox 5"/>
           <p:cNvSpPr txBox="1"/>
           <p:nvPr/>
         </p:nvSpPr>
@@ -7832,7 +7987,7 @@
       </p:sp>
       <p:sp>
         <p:nvSpPr>
-          <p:cNvPr id="134022706" name="Rectangle 6"/>
+          <p:cNvPr id="685665347" name="Rectangle 6"/>
           <p:cNvSpPr/>
           <p:nvPr/>
         </p:nvSpPr>
@@ -8169,7 +8324,7 @@
       </p:sp>
       <p:pic>
         <p:nvPicPr>
-          <p:cNvPr id="816065520" name="Picture 8" descr="package.png"/>
+          <p:cNvPr id="1284018067" name="Picture 8" descr="package.png"/>
           <p:cNvPicPr>
             <a:picLocks noChangeAspect="1"/>
           </p:cNvPicPr>
@@ -8191,7 +8346,7 @@
       </p:pic>
       <p:sp>
         <p:nvSpPr>
-          <p:cNvPr id="1689500331" name="TextBox 9"/>
+          <p:cNvPr id="399000395" name="TextBox 9"/>
           <p:cNvSpPr txBox="1"/>
           <p:nvPr/>
         </p:nvSpPr>
@@ -8229,7 +8384,7 @@
       </p:sp>
       <p:pic>
         <p:nvPicPr>
-          <p:cNvPr id="74673302" name=""/>
+          <p:cNvPr id="437335462" name=""/>
           <p:cNvPicPr>
             <a:picLocks noChangeAspect="1"/>
           </p:cNvPicPr>
@@ -8284,7 +8439,7 @@
       </p:grpSpPr>
       <p:sp>
         <p:nvSpPr>
-          <p:cNvPr id="399817508" name="Rectangle 1"/>
+          <p:cNvPr id="1459691479" name="Rectangle 1"/>
           <p:cNvSpPr/>
           <p:nvPr/>
         </p:nvSpPr>
@@ -8331,7 +8486,7 @@
       </p:sp>
       <p:sp>
         <p:nvSpPr>
-          <p:cNvPr id="995438131" name="TextBox 2"/>
+          <p:cNvPr id="1636451276" name="TextBox 2"/>
           <p:cNvSpPr txBox="1"/>
           <p:nvPr/>
         </p:nvSpPr>
@@ -8384,7 +8539,7 @@
       </p:sp>
       <p:sp>
         <p:nvSpPr>
-          <p:cNvPr id="783441307" name="Rectangle 3"/>
+          <p:cNvPr id="1286491261" name="Rectangle 3"/>
           <p:cNvSpPr/>
           <p:nvPr/>
         </p:nvSpPr>
@@ -8431,7 +8586,7 @@
       </p:sp>
       <p:sp>
         <p:nvSpPr>
-          <p:cNvPr id="1388309753" name="TextBox 4"/>
+          <p:cNvPr id="833023444" name="TextBox 4"/>
           <p:cNvSpPr txBox="1"/>
           <p:nvPr/>
         </p:nvSpPr>
@@ -8469,7 +8624,7 @@
       </p:sp>
       <p:sp>
         <p:nvSpPr>
-          <p:cNvPr id="256714452" name="TextBox 5"/>
+          <p:cNvPr id="1099110561" name="TextBox 5"/>
           <p:cNvSpPr txBox="1"/>
           <p:nvPr/>
         </p:nvSpPr>
@@ -8507,7 +8662,7 @@
       </p:sp>
       <p:sp>
         <p:nvSpPr>
-          <p:cNvPr id="1853400688" name="TextBox 6"/>
+          <p:cNvPr id="1625571060" name="TextBox 6"/>
           <p:cNvSpPr txBox="1"/>
           <p:nvPr/>
         </p:nvSpPr>
@@ -8692,7 +8847,7 @@
       </p:sp>
       <p:sp>
         <p:nvSpPr>
-          <p:cNvPr id="1458520443" name="TextBox 8"/>
+          <p:cNvPr id="1024491310" name="TextBox 8"/>
           <p:cNvSpPr txBox="1"/>
           <p:nvPr/>
         </p:nvSpPr>
@@ -8730,7 +8885,7 @@
       </p:sp>
       <p:pic>
         <p:nvPicPr>
-          <p:cNvPr id="1047325553" name=""/>
+          <p:cNvPr id="1749353489" name=""/>
           <p:cNvPicPr>
             <a:picLocks noChangeAspect="1"/>
           </p:cNvPicPr>
@@ -8752,7 +8907,7 @@
       </p:pic>
       <p:pic>
         <p:nvPicPr>
-          <p:cNvPr id="140310951" name=""/>
+          <p:cNvPr id="1524736906" name=""/>
           <p:cNvPicPr>
             <a:picLocks noChangeAspect="1"/>
           </p:cNvPicPr>
@@ -8807,7 +8962,7 @@
       </p:grpSpPr>
       <p:sp>
         <p:nvSpPr>
-          <p:cNvPr id="1404006187" name="Rectangle 1"/>
+          <p:cNvPr id="1692914755" name="Rectangle 1"/>
           <p:cNvSpPr/>
           <p:nvPr/>
         </p:nvSpPr>
@@ -8854,7 +9009,7 @@
       </p:sp>
       <p:sp>
         <p:nvSpPr>
-          <p:cNvPr id="1706935602" name="TextBox 2"/>
+          <p:cNvPr id="664138744" name="TextBox 2"/>
           <p:cNvSpPr txBox="1"/>
           <p:nvPr/>
         </p:nvSpPr>
@@ -8907,7 +9062,7 @@
       </p:sp>
       <p:sp>
         <p:nvSpPr>
-          <p:cNvPr id="1908831933" name="Rectangle 3"/>
+          <p:cNvPr id="1164214114" name="Rectangle 3"/>
           <p:cNvSpPr/>
           <p:nvPr/>
         </p:nvSpPr>
@@ -8954,7 +9109,7 @@
       </p:sp>
       <p:sp>
         <p:nvSpPr>
-          <p:cNvPr id="2049477209" name="TextBox 4"/>
+          <p:cNvPr id="674119715" name="TextBox 4"/>
           <p:cNvSpPr txBox="1"/>
           <p:nvPr/>
         </p:nvSpPr>
@@ -8992,7 +9147,7 @@
       </p:sp>
       <p:sp>
         <p:nvSpPr>
-          <p:cNvPr id="1787615925" name="TextBox 5"/>
+          <p:cNvPr id="796175190" name="TextBox 5"/>
           <p:cNvSpPr txBox="1"/>
           <p:nvPr/>
         </p:nvSpPr>
@@ -9030,7 +9185,7 @@
       </p:sp>
       <p:sp>
         <p:nvSpPr>
-          <p:cNvPr id="9138653" name="TextBox 6"/>
+          <p:cNvPr id="992403765" name="TextBox 6"/>
           <p:cNvSpPr txBox="1"/>
           <p:nvPr/>
         </p:nvSpPr>
@@ -9251,7 +9406,7 @@
       </p:sp>
       <p:pic>
         <p:nvPicPr>
-          <p:cNvPr id="506249333" name=""/>
+          <p:cNvPr id="1066545947" name=""/>
           <p:cNvPicPr>
             <a:picLocks noChangeAspect="1"/>
           </p:cNvPicPr>
@@ -9306,7 +9461,7 @@
       </p:grpSpPr>
       <p:sp>
         <p:nvSpPr>
-          <p:cNvPr id="354056708" name="Rectangle 1"/>
+          <p:cNvPr id="698422049" name="Rectangle 1"/>
           <p:cNvSpPr/>
           <p:nvPr/>
         </p:nvSpPr>
@@ -9353,7 +9508,7 @@
       </p:sp>
       <p:sp>
         <p:nvSpPr>
-          <p:cNvPr id="308635463" name="TextBox 2"/>
+          <p:cNvPr id="491794550" name="TextBox 2"/>
           <p:cNvSpPr txBox="1"/>
           <p:nvPr/>
         </p:nvSpPr>
@@ -9423,7 +9578,7 @@
       </p:sp>
       <p:sp>
         <p:nvSpPr>
-          <p:cNvPr id="1963565521" name="Rectangle 3"/>
+          <p:cNvPr id="812085456" name="Rectangle 3"/>
           <p:cNvSpPr/>
           <p:nvPr/>
         </p:nvSpPr>
@@ -9470,7 +9625,7 @@
       </p:sp>
       <p:sp>
         <p:nvSpPr>
-          <p:cNvPr id="1558365297" name="TextBox 4"/>
+          <p:cNvPr id="312734906" name="TextBox 4"/>
           <p:cNvSpPr txBox="1"/>
           <p:nvPr/>
         </p:nvSpPr>
@@ -9508,7 +9663,7 @@
       </p:sp>
       <p:sp>
         <p:nvSpPr>
-          <p:cNvPr id="2083113762" name="TextBox 5"/>
+          <p:cNvPr id="1762847812" name="TextBox 5"/>
           <p:cNvSpPr txBox="1"/>
           <p:nvPr/>
         </p:nvSpPr>
@@ -9546,7 +9701,7 @@
       </p:sp>
       <p:sp>
         <p:nvSpPr>
-          <p:cNvPr id="1740979636" name="TextBox 6"/>
+          <p:cNvPr id="2019859711" name="TextBox 6"/>
           <p:cNvSpPr txBox="1"/>
           <p:nvPr/>
         </p:nvSpPr>
@@ -9584,7 +9739,7 @@
       </p:sp>
       <p:sp>
         <p:nvSpPr>
-          <p:cNvPr id="1605389762" name="Rectangle 7"/>
+          <p:cNvPr id="645323239" name="Rectangle 7"/>
           <p:cNvSpPr/>
           <p:nvPr/>
         </p:nvSpPr>
@@ -9876,7 +10031,7 @@
       </p:sp>
       <p:sp>
         <p:nvSpPr>
-          <p:cNvPr id="345568557" name="TextBox 8"/>
+          <p:cNvPr id="880005468" name="TextBox 8"/>
           <p:cNvSpPr txBox="1"/>
           <p:nvPr/>
         </p:nvSpPr>
@@ -9914,7 +10069,7 @@
       </p:sp>
       <p:sp>
         <p:nvSpPr>
-          <p:cNvPr id="1880153670" name="Rectangle 9"/>
+          <p:cNvPr id="1774230620" name="Rectangle 9"/>
           <p:cNvSpPr/>
           <p:nvPr/>
         </p:nvSpPr>
@@ -10209,7 +10364,7 @@
       </p:sp>
       <p:sp>
         <p:nvSpPr>
-          <p:cNvPr id="155722980" name="TextBox 10"/>
+          <p:cNvPr id="1641624599" name="TextBox 10"/>
           <p:cNvSpPr txBox="1"/>
           <p:nvPr/>
         </p:nvSpPr>
@@ -10247,7 +10402,7 @@
       </p:sp>
       <p:pic>
         <p:nvPicPr>
-          <p:cNvPr id="1891648665" name=""/>
+          <p:cNvPr id="1176620662" name=""/>
           <p:cNvPicPr>
             <a:picLocks noChangeAspect="1"/>
           </p:cNvPicPr>
@@ -10302,7 +10457,7 @@
       </p:grpSpPr>
       <p:sp>
         <p:nvSpPr>
-          <p:cNvPr id="172553503" name="Rectangle 1"/>
+          <p:cNvPr id="367579832" name="Rectangle 1"/>
           <p:cNvSpPr/>
           <p:nvPr/>
         </p:nvSpPr>
@@ -10349,7 +10504,7 @@
       </p:sp>
       <p:sp>
         <p:nvSpPr>
-          <p:cNvPr id="1824414061" name="TextBox 2"/>
+          <p:cNvPr id="1917769960" name="TextBox 2"/>
           <p:cNvSpPr txBox="1"/>
           <p:nvPr/>
         </p:nvSpPr>
@@ -10419,7 +10574,7 @@
       </p:sp>
       <p:sp>
         <p:nvSpPr>
-          <p:cNvPr id="602314334" name="Rectangle 3"/>
+          <p:cNvPr id="2113436009" name="Rectangle 3"/>
           <p:cNvSpPr/>
           <p:nvPr/>
         </p:nvSpPr>
@@ -10466,7 +10621,7 @@
       </p:sp>
       <p:sp>
         <p:nvSpPr>
-          <p:cNvPr id="314109874" name="TextBox 4"/>
+          <p:cNvPr id="151566146" name="TextBox 4"/>
           <p:cNvSpPr txBox="1"/>
           <p:nvPr/>
         </p:nvSpPr>
@@ -10504,7 +10659,7 @@
       </p:sp>
       <p:sp>
         <p:nvSpPr>
-          <p:cNvPr id="227869576" name="TextBox 5"/>
+          <p:cNvPr id="1607571987" name="TextBox 5"/>
           <p:cNvSpPr txBox="1"/>
           <p:nvPr/>
         </p:nvSpPr>
@@ -10542,7 +10697,7 @@
       </p:sp>
       <p:sp>
         <p:nvSpPr>
-          <p:cNvPr id="2067628070" name="TextBox 6"/>
+          <p:cNvPr id="1989734886" name="TextBox 6"/>
           <p:cNvSpPr txBox="1"/>
           <p:nvPr/>
         </p:nvSpPr>
@@ -10580,7 +10735,7 @@
       </p:sp>
       <p:sp>
         <p:nvSpPr>
-          <p:cNvPr id="295357867" name="Rectangle 7"/>
+          <p:cNvPr id="466927405" name="Rectangle 7"/>
           <p:cNvSpPr/>
           <p:nvPr/>
         </p:nvSpPr>
@@ -10770,7 +10925,7 @@
       </p:sp>
       <p:sp>
         <p:nvSpPr>
-          <p:cNvPr id="2014345894" name="TextBox 8"/>
+          <p:cNvPr id="682074538" name="TextBox 8"/>
           <p:cNvSpPr txBox="1"/>
           <p:nvPr/>
         </p:nvSpPr>
@@ -10808,7 +10963,7 @@
       </p:sp>
       <p:sp>
         <p:nvSpPr>
-          <p:cNvPr id="1252406107" name="Rectangle 9"/>
+          <p:cNvPr id="1507130943" name="Rectangle 9"/>
           <p:cNvSpPr/>
           <p:nvPr/>
         </p:nvSpPr>
@@ -11082,7 +11237,7 @@
       </p:sp>
       <p:sp>
         <p:nvSpPr>
-          <p:cNvPr id="1788740478" name="TextBox 10"/>
+          <p:cNvPr id="1777873829" name="TextBox 10"/>
           <p:cNvSpPr txBox="1"/>
           <p:nvPr/>
         </p:nvSpPr>
@@ -11120,7 +11275,7 @@
       </p:sp>
       <p:pic>
         <p:nvPicPr>
-          <p:cNvPr id="1872446654" name=""/>
+          <p:cNvPr id="403358535" name=""/>
           <p:cNvPicPr>
             <a:picLocks noChangeAspect="1"/>
           </p:cNvPicPr>
@@ -11175,7 +11330,7 @@
       </p:grpSpPr>
       <p:sp>
         <p:nvSpPr>
-          <p:cNvPr id="2019830012" name="Rectangle 1"/>
+          <p:cNvPr id="888803067" name="Rectangle 1"/>
           <p:cNvSpPr/>
           <p:nvPr/>
         </p:nvSpPr>
@@ -11222,7 +11377,7 @@
       </p:sp>
       <p:sp>
         <p:nvSpPr>
-          <p:cNvPr id="419933332" name="TextBox 2"/>
+          <p:cNvPr id="723881056" name="TextBox 2"/>
           <p:cNvSpPr txBox="1"/>
           <p:nvPr/>
         </p:nvSpPr>
@@ -11275,7 +11430,7 @@
       </p:sp>
       <p:sp>
         <p:nvSpPr>
-          <p:cNvPr id="1083755999" name="Rectangle 3"/>
+          <p:cNvPr id="1091451544" name="Rectangle 3"/>
           <p:cNvSpPr/>
           <p:nvPr/>
         </p:nvSpPr>
@@ -11322,7 +11477,7 @@
       </p:sp>
       <p:sp>
         <p:nvSpPr>
-          <p:cNvPr id="1596987228" name="TextBox 4"/>
+          <p:cNvPr id="426315175" name="TextBox 4"/>
           <p:cNvSpPr txBox="1"/>
           <p:nvPr/>
         </p:nvSpPr>
@@ -11360,7 +11515,7 @@
       </p:sp>
       <p:sp>
         <p:nvSpPr>
-          <p:cNvPr id="743013774" name="TextBox 5"/>
+          <p:cNvPr id="580504337" name="TextBox 5"/>
           <p:cNvSpPr txBox="1"/>
           <p:nvPr/>
         </p:nvSpPr>
@@ -11398,13 +11553,13 @@
       </p:sp>
       <p:sp>
         <p:nvSpPr>
-          <p:cNvPr id="498242093" name="TextBox 7"/>
+          <p:cNvPr id="840036030" name="TextBox 7"/>
           <p:cNvSpPr txBox="1"/>
           <p:nvPr/>
         </p:nvSpPr>
         <p:spPr bwMode="auto">
           <a:xfrm flipH="0" flipV="0">
-            <a:off x="548639" y="5024626"/>
+            <a:off x="548639" y="5024625"/>
             <a:ext cx="5533559" cy="204575"/>
           </a:xfrm>
           <a:prstGeom prst="rect">
@@ -11436,13 +11591,13 @@
       </p:sp>
       <p:sp>
         <p:nvSpPr>
-          <p:cNvPr id="1464614618" name="TextBox 11"/>
+          <p:cNvPr id="2139208579" name="TextBox 11"/>
           <p:cNvSpPr txBox="1"/>
           <p:nvPr/>
         </p:nvSpPr>
         <p:spPr bwMode="auto">
           <a:xfrm flipH="0" flipV="0">
-            <a:off x="6105219" y="5024626"/>
+            <a:off x="6105219" y="5024625"/>
             <a:ext cx="5578559" cy="204575"/>
           </a:xfrm>
           <a:prstGeom prst="rect">
@@ -11474,7 +11629,7 @@
       </p:sp>
       <p:pic>
         <p:nvPicPr>
-          <p:cNvPr id="2032203312" name=""/>
+          <p:cNvPr id="1565216365" name=""/>
           <p:cNvPicPr>
             <a:picLocks noChangeAspect="1"/>
           </p:cNvPicPr>
@@ -11496,7 +11651,7 @@
       </p:pic>
       <p:pic>
         <p:nvPicPr>
-          <p:cNvPr id="1068477340" name=""/>
+          <p:cNvPr id="1237849473" name=""/>
           <p:cNvPicPr>
             <a:picLocks noChangeAspect="1"/>
           </p:cNvPicPr>
@@ -11518,7 +11673,7 @@
       </p:pic>
       <p:pic>
         <p:nvPicPr>
-          <p:cNvPr id="441144804" name=""/>
+          <p:cNvPr id="952018164" name=""/>
           <p:cNvPicPr>
             <a:picLocks noChangeAspect="1"/>
           </p:cNvPicPr>
@@ -11573,7 +11728,7 @@
       </p:grpSpPr>
       <p:sp>
         <p:nvSpPr>
-          <p:cNvPr id="1316165939" name="Rectangle 1"/>
+          <p:cNvPr id="1439508632" name="Rectangle 1"/>
           <p:cNvSpPr/>
           <p:nvPr/>
         </p:nvSpPr>
@@ -11620,7 +11775,7 @@
       </p:sp>
       <p:sp>
         <p:nvSpPr>
-          <p:cNvPr id="785022909" name="TextBox 2"/>
+          <p:cNvPr id="794795526" name="TextBox 2"/>
           <p:cNvSpPr txBox="1"/>
           <p:nvPr/>
         </p:nvSpPr>
@@ -11673,7 +11828,7 @@
       </p:sp>
       <p:sp>
         <p:nvSpPr>
-          <p:cNvPr id="982781926" name="Rectangle 3"/>
+          <p:cNvPr id="1078775378" name="Rectangle 3"/>
           <p:cNvSpPr/>
           <p:nvPr/>
         </p:nvSpPr>
@@ -11720,7 +11875,7 @@
       </p:sp>
       <p:sp>
         <p:nvSpPr>
-          <p:cNvPr id="210622635" name="TextBox 4"/>
+          <p:cNvPr id="1473011217" name="TextBox 4"/>
           <p:cNvSpPr txBox="1"/>
           <p:nvPr/>
         </p:nvSpPr>
@@ -11758,7 +11913,7 @@
       </p:sp>
       <p:sp>
         <p:nvSpPr>
-          <p:cNvPr id="1814113909" name="TextBox 5"/>
+          <p:cNvPr id="1885703581" name="TextBox 5"/>
           <p:cNvSpPr txBox="1"/>
           <p:nvPr/>
         </p:nvSpPr>
@@ -11796,7 +11951,7 @@
       </p:sp>
       <p:sp>
         <p:nvSpPr>
-          <p:cNvPr id="229352445" name="Rectangle 6"/>
+          <p:cNvPr id="1974099635" name="Rectangle 6"/>
           <p:cNvSpPr/>
           <p:nvPr/>
         </p:nvSpPr>
@@ -11845,7 +12000,7 @@
       </p:sp>
       <p:sp>
         <p:nvSpPr>
-          <p:cNvPr id="1734310430" name="TextBox 7"/>
+          <p:cNvPr id="1936603592" name="TextBox 7"/>
           <p:cNvSpPr txBox="1"/>
           <p:nvPr/>
         </p:nvSpPr>
@@ -11898,7 +12053,7 @@
       </p:sp>
       <p:sp>
         <p:nvSpPr>
-          <p:cNvPr id="1077194265" name="Rectangle 8"/>
+          <p:cNvPr id="650828331" name="Rectangle 8"/>
           <p:cNvSpPr/>
           <p:nvPr/>
         </p:nvSpPr>
@@ -11947,7 +12102,7 @@
       </p:sp>
       <p:sp>
         <p:nvSpPr>
-          <p:cNvPr id="1795149773" name="TextBox 9"/>
+          <p:cNvPr id="178074893" name="TextBox 9"/>
           <p:cNvSpPr txBox="1"/>
           <p:nvPr/>
         </p:nvSpPr>
@@ -12000,7 +12155,7 @@
       </p:sp>
       <p:sp>
         <p:nvSpPr>
-          <p:cNvPr id="307080807" name="Rectangle 10"/>
+          <p:cNvPr id="1801122727" name="Rectangle 10"/>
           <p:cNvSpPr/>
           <p:nvPr/>
         </p:nvSpPr>
@@ -12049,7 +12204,7 @@
       </p:sp>
       <p:sp>
         <p:nvSpPr>
-          <p:cNvPr id="627458664" name="TextBox 11"/>
+          <p:cNvPr id="1551617515" name="TextBox 11"/>
           <p:cNvSpPr txBox="1"/>
           <p:nvPr/>
         </p:nvSpPr>
@@ -12102,7 +12257,7 @@
       </p:sp>
       <p:sp>
         <p:nvSpPr>
-          <p:cNvPr id="1773933027" name="Rectangle 12"/>
+          <p:cNvPr id="2064485973" name="Rectangle 12"/>
           <p:cNvSpPr/>
           <p:nvPr/>
         </p:nvSpPr>
@@ -12151,7 +12306,7 @@
       </p:sp>
       <p:sp>
         <p:nvSpPr>
-          <p:cNvPr id="153365318" name="TextBox 13"/>
+          <p:cNvPr id="1339150235" name="TextBox 13"/>
           <p:cNvSpPr txBox="1"/>
           <p:nvPr/>
         </p:nvSpPr>
@@ -12204,7 +12359,7 @@
       </p:sp>
       <p:sp>
         <p:nvSpPr>
-          <p:cNvPr id="570054776" name="TextBox 14"/>
+          <p:cNvPr id="1331730476" name="TextBox 14"/>
           <p:cNvSpPr txBox="1"/>
           <p:nvPr/>
         </p:nvSpPr>
@@ -12371,7 +12526,7 @@
       </p:sp>
       <p:pic>
         <p:nvPicPr>
-          <p:cNvPr id="1344829030" name=""/>
+          <p:cNvPr id="32616107" name=""/>
           <p:cNvPicPr>
             <a:picLocks noChangeAspect="1"/>
           </p:cNvPicPr>
@@ -12426,7 +12581,7 @@
       </p:grpSpPr>
       <p:sp>
         <p:nvSpPr>
-          <p:cNvPr id="1750235752" name="Rectangle 1"/>
+          <p:cNvPr id="1767335669" name="Rectangle 1"/>
           <p:cNvSpPr/>
           <p:nvPr/>
         </p:nvSpPr>
@@ -12473,7 +12628,7 @@
       </p:sp>
       <p:sp>
         <p:nvSpPr>
-          <p:cNvPr id="335525365" name="TextBox 2"/>
+          <p:cNvPr id="1755763638" name="TextBox 2"/>
           <p:cNvSpPr txBox="1"/>
           <p:nvPr/>
         </p:nvSpPr>
@@ -12526,7 +12681,7 @@
       </p:sp>
       <p:sp>
         <p:nvSpPr>
-          <p:cNvPr id="495861757" name="Rectangle 3"/>
+          <p:cNvPr id="683237187" name="Rectangle 3"/>
           <p:cNvSpPr/>
           <p:nvPr/>
         </p:nvSpPr>
@@ -12573,7 +12728,7 @@
       </p:sp>
       <p:sp>
         <p:nvSpPr>
-          <p:cNvPr id="1503073081" name="TextBox 4"/>
+          <p:cNvPr id="905754348" name="TextBox 4"/>
           <p:cNvSpPr txBox="1"/>
           <p:nvPr/>
         </p:nvSpPr>
@@ -12611,7 +12766,7 @@
       </p:sp>
       <p:sp>
         <p:nvSpPr>
-          <p:cNvPr id="548583515" name="TextBox 5"/>
+          <p:cNvPr id="2014946379" name="TextBox 5"/>
           <p:cNvSpPr txBox="1"/>
           <p:nvPr/>
         </p:nvSpPr>
@@ -12649,7 +12804,7 @@
       </p:sp>
       <p:sp>
         <p:nvSpPr>
-          <p:cNvPr id="2062668471" name="Rectangle 6"/>
+          <p:cNvPr id="810858003" name="Rectangle 6"/>
           <p:cNvSpPr/>
           <p:nvPr/>
         </p:nvSpPr>
@@ -12698,7 +12853,7 @@
       </p:sp>
       <p:sp>
         <p:nvSpPr>
-          <p:cNvPr id="486542134" name="TextBox 7"/>
+          <p:cNvPr id="2112213625" name="TextBox 7"/>
           <p:cNvSpPr txBox="1"/>
           <p:nvPr/>
         </p:nvSpPr>
@@ -12751,7 +12906,7 @@
       </p:sp>
       <p:sp>
         <p:nvSpPr>
-          <p:cNvPr id="658084523" name="Rectangle 8"/>
+          <p:cNvPr id="815952684" name="Rectangle 8"/>
           <p:cNvSpPr/>
           <p:nvPr/>
         </p:nvSpPr>
@@ -12800,7 +12955,7 @@
       </p:sp>
       <p:sp>
         <p:nvSpPr>
-          <p:cNvPr id="119450259" name="TextBox 9"/>
+          <p:cNvPr id="2036791470" name="TextBox 9"/>
           <p:cNvSpPr txBox="1"/>
           <p:nvPr/>
         </p:nvSpPr>
@@ -12853,7 +13008,7 @@
       </p:sp>
       <p:sp>
         <p:nvSpPr>
-          <p:cNvPr id="799091614" name="Rectangle 10"/>
+          <p:cNvPr id="1703935789" name="Rectangle 10"/>
           <p:cNvSpPr/>
           <p:nvPr/>
         </p:nvSpPr>
@@ -12902,7 +13057,7 @@
       </p:sp>
       <p:sp>
         <p:nvSpPr>
-          <p:cNvPr id="1486446974" name="TextBox 11"/>
+          <p:cNvPr id="1404358321" name="TextBox 11"/>
           <p:cNvSpPr txBox="1"/>
           <p:nvPr/>
         </p:nvSpPr>
@@ -12955,7 +13110,7 @@
       </p:sp>
       <p:sp>
         <p:nvSpPr>
-          <p:cNvPr id="128450485" name="Rectangle 12"/>
+          <p:cNvPr id="656478784" name="Rectangle 12"/>
           <p:cNvSpPr/>
           <p:nvPr/>
         </p:nvSpPr>
@@ -13004,7 +13159,7 @@
       </p:sp>
       <p:sp>
         <p:nvSpPr>
-          <p:cNvPr id="2089075085" name="TextBox 13"/>
+          <p:cNvPr id="1894670728" name="TextBox 13"/>
           <p:cNvSpPr txBox="1"/>
           <p:nvPr/>
         </p:nvSpPr>
@@ -13057,7 +13212,7 @@
       </p:sp>
       <p:sp>
         <p:nvSpPr>
-          <p:cNvPr id="677804242" name="TextBox 14"/>
+          <p:cNvPr id="914001139" name="TextBox 14"/>
           <p:cNvSpPr txBox="1"/>
           <p:nvPr/>
         </p:nvSpPr>
@@ -13260,7 +13415,7 @@
       </p:sp>
       <p:pic>
         <p:nvPicPr>
-          <p:cNvPr id="1307618220" name=""/>
+          <p:cNvPr id="1292466735" name=""/>
           <p:cNvPicPr>
             <a:picLocks noChangeAspect="1"/>
           </p:cNvPicPr>
@@ -13315,7 +13470,7 @@
       </p:grpSpPr>
       <p:sp>
         <p:nvSpPr>
-          <p:cNvPr id="1055074764" name="Rectangle 1"/>
+          <p:cNvPr id="1854336081" name="Rectangle 1"/>
           <p:cNvSpPr/>
           <p:nvPr/>
         </p:nvSpPr>
@@ -13362,14 +13517,14 @@
       </p:sp>
       <p:sp>
         <p:nvSpPr>
-          <p:cNvPr id="1040061496" name="TextBox 2"/>
+          <p:cNvPr id="1581376982" name="TextBox 2"/>
           <p:cNvSpPr txBox="1"/>
           <p:nvPr/>
         </p:nvSpPr>
         <p:spPr bwMode="auto">
           <a:xfrm>
-            <a:off x="548640" y="384048"/>
-            <a:ext cx="11094415" cy="868680"/>
+            <a:off x="548640" y="510539"/>
+            <a:ext cx="11094774" cy="616055"/>
           </a:xfrm>
           <a:prstGeom prst="rect">
             <a:avLst/>
@@ -13403,7 +13558,7 @@
             <a:r>
               <a:rPr sz="2600" b="1" i="0">
                 <a:solidFill>
-                  <a:srgbClr val="0F172A"/>
+                  <a:schemeClr val="tx1"/>
                 </a:solidFill>
                 <a:latin typeface="Segoe UI"/>
               </a:rPr>
@@ -13415,7 +13570,7 @@
       </p:sp>
       <p:sp>
         <p:nvSpPr>
-          <p:cNvPr id="1872920413" name="Rectangle 3"/>
+          <p:cNvPr id="1387213902" name="Rectangle 3"/>
           <p:cNvSpPr/>
           <p:nvPr/>
         </p:nvSpPr>
@@ -13462,7 +13617,7 @@
       </p:sp>
       <p:sp>
         <p:nvSpPr>
-          <p:cNvPr id="749020569" name="TextBox 4"/>
+          <p:cNvPr id="1730054506" name="TextBox 4"/>
           <p:cNvSpPr txBox="1"/>
           <p:nvPr/>
         </p:nvSpPr>
@@ -13500,7 +13655,7 @@
       </p:sp>
       <p:sp>
         <p:nvSpPr>
-          <p:cNvPr id="780864100" name="TextBox 5"/>
+          <p:cNvPr id="210420299" name="TextBox 5"/>
           <p:cNvSpPr txBox="1"/>
           <p:nvPr/>
         </p:nvSpPr>
@@ -13538,14 +13693,14 @@
       </p:sp>
       <p:sp>
         <p:nvSpPr>
-          <p:cNvPr id="627428217" name="TextBox 6"/>
+          <p:cNvPr id="1817565679" name="TextBox 6"/>
           <p:cNvSpPr txBox="1"/>
           <p:nvPr/>
         </p:nvSpPr>
         <p:spPr bwMode="auto">
           <a:xfrm>
             <a:off x="640080" y="1691640"/>
-            <a:ext cx="10913334" cy="3648816"/>
+            <a:ext cx="10914053" cy="3648816"/>
           </a:xfrm>
           <a:prstGeom prst="rect">
             <a:avLst/>
@@ -13580,7 +13735,25 @@
                 </a:solidFill>
                 <a:latin typeface="Segoe UI"/>
               </a:rPr>
-              <a:t>Рост личных данных:</a:t>
+              <a:t>Рост </a:t>
+            </a:r>
+            <a:r>
+              <a:rPr sz="1800" b="1" i="0">
+                <a:solidFill>
+                  <a:schemeClr val="tx1"/>
+                </a:solidFill>
+                <a:latin typeface="Segoe UI"/>
+              </a:rPr>
+              <a:t>личных </a:t>
+            </a:r>
+            <a:r>
+              <a:rPr sz="1800" b="1" i="0">
+                <a:solidFill>
+                  <a:srgbClr val="0F172A"/>
+                </a:solidFill>
+                <a:latin typeface="Segoe UI"/>
+              </a:rPr>
+              <a:t>данных:</a:t>
             </a:r>
             <a:r>
               <a:rPr sz="1800" b="0" i="0">
@@ -13661,7 +13834,25 @@
                 </a:solidFill>
                 <a:latin typeface="Segoe UI"/>
               </a:rPr>
-              <a:t> (Nextcloud, ownCloud, Seafile) решает приватность, но рассчитан на мощные серверы: файловый трафик идёт через приложение → высокая нагрузка CPU/RAM.</a:t>
+              <a:t> (</a:t>
+            </a:r>
+            <a:r>
+              <a:rPr sz="1800" b="0" i="0">
+                <a:solidFill>
+                  <a:srgbClr val="334155"/>
+                </a:solidFill>
+                <a:latin typeface="Segoe UI"/>
+              </a:rPr>
+              <a:t>Nextcloud</a:t>
+            </a:r>
+            <a:r>
+              <a:rPr sz="1800" b="0" i="0">
+                <a:solidFill>
+                  <a:srgbClr val="334155"/>
+                </a:solidFill>
+                <a:latin typeface="Segoe UI"/>
+              </a:rPr>
+              <a:t>, ownCloud, Seafile) решает приватность, но рассчитан на мощные серверы: файловый трафик идёт через приложение → высокая нагрузка CPU/RAM.</a:t>
             </a:r>
             <a:endParaRPr/>
           </a:p>
@@ -13732,7 +13923,7 @@
       </p:sp>
       <p:pic>
         <p:nvPicPr>
-          <p:cNvPr id="953029599" name=""/>
+          <p:cNvPr id="1665298061" name=""/>
           <p:cNvPicPr>
             <a:picLocks noChangeAspect="1"/>
           </p:cNvPicPr>
@@ -13787,7 +13978,7 @@
       </p:grpSpPr>
       <p:sp>
         <p:nvSpPr>
-          <p:cNvPr id="460973939" name="Rectangle 1"/>
+          <p:cNvPr id="1045139366" name="Rectangle 1"/>
           <p:cNvSpPr/>
           <p:nvPr/>
         </p:nvSpPr>
@@ -13834,7 +14025,7 @@
       </p:sp>
       <p:sp>
         <p:nvSpPr>
-          <p:cNvPr id="616589017" name="TextBox 2"/>
+          <p:cNvPr id="25700740" name="TextBox 2"/>
           <p:cNvSpPr txBox="1"/>
           <p:nvPr/>
         </p:nvSpPr>
@@ -13887,7 +14078,7 @@
       </p:sp>
       <p:sp>
         <p:nvSpPr>
-          <p:cNvPr id="582773857" name="Rectangle 3"/>
+          <p:cNvPr id="1132493131" name="Rectangle 3"/>
           <p:cNvSpPr/>
           <p:nvPr/>
         </p:nvSpPr>
@@ -13934,7 +14125,7 @@
       </p:sp>
       <p:sp>
         <p:nvSpPr>
-          <p:cNvPr id="1690458085" name="TextBox 4"/>
+          <p:cNvPr id="305087933" name="TextBox 4"/>
           <p:cNvSpPr txBox="1"/>
           <p:nvPr/>
         </p:nvSpPr>
@@ -13972,7 +14163,7 @@
       </p:sp>
       <p:sp>
         <p:nvSpPr>
-          <p:cNvPr id="364814356" name="TextBox 5"/>
+          <p:cNvPr id="17064308" name="TextBox 5"/>
           <p:cNvSpPr txBox="1"/>
           <p:nvPr/>
         </p:nvSpPr>
@@ -14010,7 +14201,7 @@
       </p:sp>
       <p:sp>
         <p:nvSpPr>
-          <p:cNvPr id="1155699655" name="TextBox 6"/>
+          <p:cNvPr id="138647322" name="TextBox 6"/>
           <p:cNvSpPr txBox="1"/>
           <p:nvPr/>
         </p:nvSpPr>
@@ -14249,7 +14440,7 @@
       </p:sp>
       <p:pic>
         <p:nvPicPr>
-          <p:cNvPr id="860390678" name=""/>
+          <p:cNvPr id="206248197" name=""/>
           <p:cNvPicPr>
             <a:picLocks noChangeAspect="1"/>
           </p:cNvPicPr>
@@ -14304,7 +14495,7 @@
       </p:grpSpPr>
       <p:sp>
         <p:nvSpPr>
-          <p:cNvPr id="435885739" name="Rectangle 1"/>
+          <p:cNvPr id="167534016" name="Rectangle 1"/>
           <p:cNvSpPr/>
           <p:nvPr/>
         </p:nvSpPr>
@@ -14351,7 +14542,7 @@
       </p:sp>
       <p:sp>
         <p:nvSpPr>
-          <p:cNvPr id="1255518169" name="TextBox 2"/>
+          <p:cNvPr id="512714503" name="TextBox 2"/>
           <p:cNvSpPr txBox="1"/>
           <p:nvPr/>
         </p:nvSpPr>
@@ -14404,7 +14595,7 @@
       </p:sp>
       <p:sp>
         <p:nvSpPr>
-          <p:cNvPr id="429435679" name="Rectangle 3"/>
+          <p:cNvPr id="269273582" name="Rectangle 3"/>
           <p:cNvSpPr/>
           <p:nvPr/>
         </p:nvSpPr>
@@ -14451,7 +14642,7 @@
       </p:sp>
       <p:sp>
         <p:nvSpPr>
-          <p:cNvPr id="1895576332" name="TextBox 4"/>
+          <p:cNvPr id="49306350" name="TextBox 4"/>
           <p:cNvSpPr txBox="1"/>
           <p:nvPr/>
         </p:nvSpPr>
@@ -14489,7 +14680,7 @@
       </p:sp>
       <p:sp>
         <p:nvSpPr>
-          <p:cNvPr id="75168688" name="TextBox 5"/>
+          <p:cNvPr id="526468840" name="TextBox 5"/>
           <p:cNvSpPr txBox="1"/>
           <p:nvPr/>
         </p:nvSpPr>
@@ -14527,7 +14718,7 @@
       </p:sp>
       <p:sp>
         <p:nvSpPr>
-          <p:cNvPr id="170576456" name="TextBox 6"/>
+          <p:cNvPr id="144878974" name="TextBox 6"/>
           <p:cNvSpPr txBox="1"/>
           <p:nvPr/>
         </p:nvSpPr>
@@ -14685,7 +14876,7 @@
       </p:sp>
       <p:pic>
         <p:nvPicPr>
-          <p:cNvPr id="857851820" name=""/>
+          <p:cNvPr id="2136735300" name=""/>
           <p:cNvPicPr>
             <a:picLocks noChangeAspect="1"/>
           </p:cNvPicPr>
@@ -14740,7 +14931,7 @@
       </p:grpSpPr>
       <p:sp>
         <p:nvSpPr>
-          <p:cNvPr id="203677138" name="Rectangle 1"/>
+          <p:cNvPr id="551983506" name="Rectangle 1"/>
           <p:cNvSpPr/>
           <p:nvPr/>
         </p:nvSpPr>
@@ -14753,7 +14944,7 @@
             <a:avLst/>
           </a:prstGeom>
           <a:solidFill>
-            <a:srgbClr val="0F172A"/>
+            <a:schemeClr val="bg1"/>
           </a:solidFill>
           <a:ln>
             <a:noFill/>
@@ -14787,7 +14978,7 @@
       </p:sp>
       <p:sp>
         <p:nvSpPr>
-          <p:cNvPr id="1175623293" name="Rectangle 2"/>
+          <p:cNvPr id="1094986562" name="Rectangle 2"/>
           <p:cNvSpPr/>
           <p:nvPr/>
         </p:nvSpPr>
@@ -14834,7 +15025,7 @@
       </p:sp>
       <p:sp>
         <p:nvSpPr>
-          <p:cNvPr id="129158515" name="Rectangle 3"/>
+          <p:cNvPr id="1657059533" name="Rectangle 3"/>
           <p:cNvSpPr/>
           <p:nvPr/>
         </p:nvSpPr>
@@ -14881,14 +15072,14 @@
       </p:sp>
       <p:sp>
         <p:nvSpPr>
-          <p:cNvPr id="758466810" name="TextBox 4"/>
+          <p:cNvPr id="631803353" name="TextBox 4"/>
           <p:cNvSpPr txBox="1"/>
           <p:nvPr/>
         </p:nvSpPr>
         <p:spPr bwMode="auto">
           <a:xfrm>
-            <a:off x="914400" y="2377440"/>
-            <a:ext cx="10362895" cy="2103120"/>
+            <a:off x="914400" y="2847011"/>
+            <a:ext cx="10363614" cy="1164695"/>
           </a:xfrm>
           <a:prstGeom prst="rect">
             <a:avLst/>
@@ -14907,13 +15098,17 @@
             <a:r>
               <a:rPr sz="4000" b="1" i="0">
                 <a:solidFill>
-                  <a:srgbClr val="FFFFFF"/>
+                  <a:schemeClr val="tx1"/>
                 </a:solidFill>
                 <a:latin typeface="Segoe UI"/>
               </a:rPr>
               <a:t>Спасибо за внимание!</a:t>
             </a:r>
-            <a:endParaRPr/>
+            <a:endParaRPr>
+              <a:solidFill>
+                <a:schemeClr val="tx1"/>
+              </a:solidFill>
+            </a:endParaRPr>
           </a:p>
           <a:p>
             <a:pPr algn="ctr">
@@ -14922,13 +15117,17 @@
             <a:r>
               <a:rPr sz="1800" b="0" i="0">
                 <a:solidFill>
-                  <a:srgbClr val="CBD5E1"/>
+                  <a:srgbClr val="334155"/>
                 </a:solidFill>
                 <a:latin typeface="Segoe UI"/>
               </a:rPr>
               <a:t>Готов ответить на вопросы</a:t>
             </a:r>
-            <a:endParaRPr/>
+            <a:endParaRPr>
+              <a:solidFill>
+                <a:srgbClr val="334155"/>
+              </a:solidFill>
+            </a:endParaRPr>
           </a:p>
           <a:p>
             <a:pPr algn="ctr">
@@ -14949,7 +15148,7 @@
       </p:sp>
       <p:pic>
         <p:nvPicPr>
-          <p:cNvPr id="1332824341" name=""/>
+          <p:cNvPr id="1915893852" name=""/>
           <p:cNvPicPr>
             <a:picLocks noChangeAspect="1"/>
           </p:cNvPicPr>
@@ -15004,7 +15203,7 @@
       </p:grpSpPr>
       <p:sp>
         <p:nvSpPr>
-          <p:cNvPr id="708578300" name="Rectangle 1"/>
+          <p:cNvPr id="76023398" name="Rectangle 1"/>
           <p:cNvSpPr/>
           <p:nvPr/>
         </p:nvSpPr>
@@ -15051,7 +15250,7 @@
       </p:sp>
       <p:sp>
         <p:nvSpPr>
-          <p:cNvPr id="688879492" name="TextBox 2"/>
+          <p:cNvPr id="495842569" name="TextBox 2"/>
           <p:cNvSpPr txBox="1"/>
           <p:nvPr/>
         </p:nvSpPr>
@@ -15104,7 +15303,7 @@
       </p:sp>
       <p:sp>
         <p:nvSpPr>
-          <p:cNvPr id="1272233088" name="Rectangle 3"/>
+          <p:cNvPr id="142559964" name="Rectangle 3"/>
           <p:cNvSpPr/>
           <p:nvPr/>
         </p:nvSpPr>
@@ -15151,7 +15350,7 @@
       </p:sp>
       <p:sp>
         <p:nvSpPr>
-          <p:cNvPr id="1064492299" name="TextBox 4"/>
+          <p:cNvPr id="1390598624" name="TextBox 4"/>
           <p:cNvSpPr txBox="1"/>
           <p:nvPr/>
         </p:nvSpPr>
@@ -15189,7 +15388,7 @@
       </p:sp>
       <p:sp>
         <p:nvSpPr>
-          <p:cNvPr id="1942005124" name="TextBox 5"/>
+          <p:cNvPr id="415383017" name="TextBox 5"/>
           <p:cNvSpPr txBox="1"/>
           <p:nvPr/>
         </p:nvSpPr>
@@ -15227,7 +15426,7 @@
       </p:sp>
       <p:sp>
         <p:nvSpPr>
-          <p:cNvPr id="1826110441" name="TextBox 6"/>
+          <p:cNvPr id="163757751" name="TextBox 6"/>
           <p:cNvSpPr txBox="1"/>
           <p:nvPr/>
         </p:nvSpPr>
@@ -15280,7 +15479,7 @@
       </p:sp>
       <p:sp>
         <p:nvSpPr>
-          <p:cNvPr id="1555233481" name="TextBox 7"/>
+          <p:cNvPr id="732950724" name="TextBox 7"/>
           <p:cNvSpPr txBox="1"/>
           <p:nvPr/>
         </p:nvSpPr>
@@ -15438,7 +15637,7 @@
       </p:sp>
       <p:pic>
         <p:nvPicPr>
-          <p:cNvPr id="1443964730" name=""/>
+          <p:cNvPr id="172221573" name=""/>
           <p:cNvPicPr>
             <a:picLocks noChangeAspect="1"/>
           </p:cNvPicPr>
@@ -15493,7 +15692,7 @@
       </p:grpSpPr>
       <p:sp>
         <p:nvSpPr>
-          <p:cNvPr id="835870578" name="Rectangle 1"/>
+          <p:cNvPr id="2107738956" name="Rectangle 1"/>
           <p:cNvSpPr/>
           <p:nvPr/>
         </p:nvSpPr>
@@ -15540,7 +15739,7 @@
       </p:sp>
       <p:sp>
         <p:nvSpPr>
-          <p:cNvPr id="1276677298" name="TextBox 2"/>
+          <p:cNvPr id="1687531021" name="TextBox 2"/>
           <p:cNvSpPr txBox="1"/>
           <p:nvPr/>
         </p:nvSpPr>
@@ -15593,7 +15792,7 @@
       </p:sp>
       <p:sp>
         <p:nvSpPr>
-          <p:cNvPr id="47310629" name="Rectangle 3"/>
+          <p:cNvPr id="275120179" name="Rectangle 3"/>
           <p:cNvSpPr/>
           <p:nvPr/>
         </p:nvSpPr>
@@ -15640,7 +15839,7 @@
       </p:sp>
       <p:sp>
         <p:nvSpPr>
-          <p:cNvPr id="1413496599" name="TextBox 4"/>
+          <p:cNvPr id="2107316478" name="TextBox 4"/>
           <p:cNvSpPr txBox="1"/>
           <p:nvPr/>
         </p:nvSpPr>
@@ -15678,7 +15877,7 @@
       </p:sp>
       <p:sp>
         <p:nvSpPr>
-          <p:cNvPr id="1840811116" name="TextBox 5"/>
+          <p:cNvPr id="317286958" name="TextBox 5"/>
           <p:cNvSpPr txBox="1"/>
           <p:nvPr/>
         </p:nvSpPr>
@@ -15716,7 +15915,7 @@
       </p:sp>
       <p:sp>
         <p:nvSpPr>
-          <p:cNvPr id="1493072588" name="TextBox 6"/>
+          <p:cNvPr id="983417788" name="TextBox 6"/>
           <p:cNvSpPr txBox="1"/>
           <p:nvPr/>
         </p:nvSpPr>
@@ -15883,7 +16082,7 @@
       </p:sp>
       <p:pic>
         <p:nvPicPr>
-          <p:cNvPr id="587503896" name="Picture 7" descr="user-case.png"/>
+          <p:cNvPr id="640438593" name="Picture 7" descr="user-case.png"/>
           <p:cNvPicPr>
             <a:picLocks noChangeAspect="1"/>
           </p:cNvPicPr>
@@ -15905,7 +16104,7 @@
       </p:pic>
       <p:sp>
         <p:nvSpPr>
-          <p:cNvPr id="1553789166" name="TextBox 8"/>
+          <p:cNvPr id="812232331" name="TextBox 8"/>
           <p:cNvSpPr txBox="1"/>
           <p:nvPr/>
         </p:nvSpPr>
@@ -15943,7 +16142,7 @@
       </p:sp>
       <p:pic>
         <p:nvPicPr>
-          <p:cNvPr id="705090802" name=""/>
+          <p:cNvPr id="2017053785" name=""/>
           <p:cNvPicPr>
             <a:picLocks noChangeAspect="1"/>
           </p:cNvPicPr>
@@ -15998,7 +16197,7 @@
       </p:grpSpPr>
       <p:sp>
         <p:nvSpPr>
-          <p:cNvPr id="855359877" name="Rectangle 1"/>
+          <p:cNvPr id="921851496" name="Rectangle 1"/>
           <p:cNvSpPr/>
           <p:nvPr/>
         </p:nvSpPr>
@@ -16045,7 +16244,7 @@
       </p:sp>
       <p:sp>
         <p:nvSpPr>
-          <p:cNvPr id="325220356" name="TextBox 2"/>
+          <p:cNvPr id="2018411144" name="TextBox 2"/>
           <p:cNvSpPr txBox="1"/>
           <p:nvPr/>
         </p:nvSpPr>
@@ -16098,7 +16297,7 @@
       </p:sp>
       <p:sp>
         <p:nvSpPr>
-          <p:cNvPr id="1295812749" name="Rectangle 3"/>
+          <p:cNvPr id="151580401" name="Rectangle 3"/>
           <p:cNvSpPr/>
           <p:nvPr/>
         </p:nvSpPr>
@@ -16145,7 +16344,7 @@
       </p:sp>
       <p:sp>
         <p:nvSpPr>
-          <p:cNvPr id="912598263" name="TextBox 4"/>
+          <p:cNvPr id="1042477667" name="TextBox 4"/>
           <p:cNvSpPr txBox="1"/>
           <p:nvPr/>
         </p:nvSpPr>
@@ -16183,7 +16382,7 @@
       </p:sp>
       <p:sp>
         <p:nvSpPr>
-          <p:cNvPr id="121052631" name="TextBox 5"/>
+          <p:cNvPr id="1467387204" name="TextBox 5"/>
           <p:cNvSpPr txBox="1"/>
           <p:nvPr/>
         </p:nvSpPr>
@@ -16221,7 +16420,7 @@
       </p:sp>
       <p:sp>
         <p:nvSpPr>
-          <p:cNvPr id="1155414585" name="TextBox 6"/>
+          <p:cNvPr id="1837736311" name="TextBox 6"/>
           <p:cNvSpPr txBox="1"/>
           <p:nvPr/>
         </p:nvSpPr>
@@ -16514,7 +16713,7 @@
       </p:sp>
       <p:pic>
         <p:nvPicPr>
-          <p:cNvPr id="172103724" name=""/>
+          <p:cNvPr id="638791470" name=""/>
           <p:cNvPicPr>
             <a:picLocks noChangeAspect="1"/>
           </p:cNvPicPr>
@@ -16569,7 +16768,7 @@
       </p:grpSpPr>
       <p:sp>
         <p:nvSpPr>
-          <p:cNvPr id="1928028551" name="Rectangle 1"/>
+          <p:cNvPr id="1698794435" name="Rectangle 1"/>
           <p:cNvSpPr/>
           <p:nvPr/>
         </p:nvSpPr>
@@ -16616,7 +16815,7 @@
       </p:sp>
       <p:sp>
         <p:nvSpPr>
-          <p:cNvPr id="1422971085" name="TextBox 2"/>
+          <p:cNvPr id="1789602800" name="TextBox 2"/>
           <p:cNvSpPr txBox="1"/>
           <p:nvPr/>
         </p:nvSpPr>
@@ -16669,7 +16868,7 @@
       </p:sp>
       <p:sp>
         <p:nvSpPr>
-          <p:cNvPr id="1282794326" name="Rectangle 3"/>
+          <p:cNvPr id="1982128068" name="Rectangle 3"/>
           <p:cNvSpPr/>
           <p:nvPr/>
         </p:nvSpPr>
@@ -16716,7 +16915,7 @@
       </p:sp>
       <p:sp>
         <p:nvSpPr>
-          <p:cNvPr id="1707122748" name="TextBox 4"/>
+          <p:cNvPr id="737871629" name="TextBox 4"/>
           <p:cNvSpPr txBox="1"/>
           <p:nvPr/>
         </p:nvSpPr>
@@ -16754,7 +16953,7 @@
       </p:sp>
       <p:sp>
         <p:nvSpPr>
-          <p:cNvPr id="1178990811" name="TextBox 5"/>
+          <p:cNvPr id="1877806856" name="TextBox 5"/>
           <p:cNvSpPr txBox="1"/>
           <p:nvPr/>
         </p:nvSpPr>
@@ -16792,7 +16991,7 @@
       </p:sp>
       <p:sp>
         <p:nvSpPr>
-          <p:cNvPr id="1744326496" name="TextBox 6"/>
+          <p:cNvPr id="610541493" name="TextBox 6"/>
           <p:cNvSpPr txBox="1"/>
           <p:nvPr/>
         </p:nvSpPr>
@@ -16995,7 +17194,7 @@
       </p:sp>
       <p:pic>
         <p:nvPicPr>
-          <p:cNvPr id="1531521804" name=""/>
+          <p:cNvPr id="854214104" name=""/>
           <p:cNvPicPr>
             <a:picLocks noChangeAspect="1"/>
           </p:cNvPicPr>
@@ -17050,7 +17249,7 @@
       </p:grpSpPr>
       <p:sp>
         <p:nvSpPr>
-          <p:cNvPr id="2130821635" name="Rectangle 1"/>
+          <p:cNvPr id="2037590784" name="Rectangle 1"/>
           <p:cNvSpPr/>
           <p:nvPr/>
         </p:nvSpPr>
@@ -17097,7 +17296,7 @@
       </p:sp>
       <p:sp>
         <p:nvSpPr>
-          <p:cNvPr id="799502123" name="TextBox 2"/>
+          <p:cNvPr id="1586028688" name="TextBox 2"/>
           <p:cNvSpPr txBox="1"/>
           <p:nvPr/>
         </p:nvSpPr>
@@ -17150,7 +17349,7 @@
       </p:sp>
       <p:sp>
         <p:nvSpPr>
-          <p:cNvPr id="1467367170" name="Rectangle 3"/>
+          <p:cNvPr id="1800221969" name="Rectangle 3"/>
           <p:cNvSpPr/>
           <p:nvPr/>
         </p:nvSpPr>
@@ -17197,7 +17396,7 @@
       </p:sp>
       <p:sp>
         <p:nvSpPr>
-          <p:cNvPr id="1700283767" name="TextBox 4"/>
+          <p:cNvPr id="112039172" name="TextBox 4"/>
           <p:cNvSpPr txBox="1"/>
           <p:nvPr/>
         </p:nvSpPr>
@@ -17235,7 +17434,7 @@
       </p:sp>
       <p:sp>
         <p:nvSpPr>
-          <p:cNvPr id="452695260" name="TextBox 5"/>
+          <p:cNvPr id="2142655501" name="TextBox 5"/>
           <p:cNvSpPr txBox="1"/>
           <p:nvPr/>
         </p:nvSpPr>
@@ -17273,7 +17472,7 @@
       </p:sp>
       <p:sp>
         <p:nvSpPr>
-          <p:cNvPr id="240333801" name="TextBox 6"/>
+          <p:cNvPr id="53353098" name="TextBox 6"/>
           <p:cNvSpPr txBox="1"/>
           <p:nvPr/>
         </p:nvSpPr>
@@ -17584,7 +17783,7 @@
       </p:sp>
       <p:pic>
         <p:nvPicPr>
-          <p:cNvPr id="53149459" name="Picture 7" descr="c2-containers.png"/>
+          <p:cNvPr id="998842428" name="Picture 7" descr="c2-containers.png"/>
           <p:cNvPicPr>
             <a:picLocks noChangeAspect="1"/>
           </p:cNvPicPr>
@@ -17597,7 +17796,7 @@
         <p:spPr bwMode="auto">
           <a:xfrm flipH="0" flipV="0">
             <a:off x="7277687" y="1252728"/>
-            <a:ext cx="3855657" cy="5010910"/>
+            <a:ext cx="3855657" cy="5010909"/>
           </a:xfrm>
           <a:prstGeom prst="rect">
             <a:avLst/>
@@ -17606,7 +17805,7 @@
       </p:pic>
       <p:sp>
         <p:nvSpPr>
-          <p:cNvPr id="871891214" name="TextBox 8"/>
+          <p:cNvPr id="1701452554" name="TextBox 8"/>
           <p:cNvSpPr txBox="1"/>
           <p:nvPr/>
         </p:nvSpPr>
@@ -17644,7 +17843,7 @@
       </p:sp>
       <p:pic>
         <p:nvPicPr>
-          <p:cNvPr id="158342738" name=""/>
+          <p:cNvPr id="1267424292" name=""/>
           <p:cNvPicPr>
             <a:picLocks noChangeAspect="1"/>
           </p:cNvPicPr>
@@ -17699,7 +17898,7 @@
       </p:grpSpPr>
       <p:sp>
         <p:nvSpPr>
-          <p:cNvPr id="1096548529" name="Rectangle 1"/>
+          <p:cNvPr id="758281129" name="Rectangle 1"/>
           <p:cNvSpPr/>
           <p:nvPr/>
         </p:nvSpPr>
@@ -17746,7 +17945,7 @@
       </p:sp>
       <p:sp>
         <p:nvSpPr>
-          <p:cNvPr id="1190703798" name="TextBox 2"/>
+          <p:cNvPr id="1690441023" name="TextBox 2"/>
           <p:cNvSpPr txBox="1"/>
           <p:nvPr/>
         </p:nvSpPr>
@@ -17799,7 +17998,7 @@
       </p:sp>
       <p:sp>
         <p:nvSpPr>
-          <p:cNvPr id="1139450422" name="Rectangle 3"/>
+          <p:cNvPr id="1496402777" name="Rectangle 3"/>
           <p:cNvSpPr/>
           <p:nvPr/>
         </p:nvSpPr>
@@ -17846,7 +18045,7 @@
       </p:sp>
       <p:sp>
         <p:nvSpPr>
-          <p:cNvPr id="1898322071" name="TextBox 4"/>
+          <p:cNvPr id="1110050973" name="TextBox 4"/>
           <p:cNvSpPr txBox="1"/>
           <p:nvPr/>
         </p:nvSpPr>
@@ -17884,7 +18083,7 @@
       </p:sp>
       <p:sp>
         <p:nvSpPr>
-          <p:cNvPr id="232951407" name="TextBox 5"/>
+          <p:cNvPr id="1512152198" name="TextBox 5"/>
           <p:cNvSpPr txBox="1"/>
           <p:nvPr/>
         </p:nvSpPr>
@@ -17922,7 +18121,7 @@
       </p:sp>
       <p:sp>
         <p:nvSpPr>
-          <p:cNvPr id="1118237600" name="TextBox 6"/>
+          <p:cNvPr id="1143967484" name="TextBox 6"/>
           <p:cNvSpPr txBox="1"/>
           <p:nvPr/>
         </p:nvSpPr>
@@ -18188,7 +18387,7 @@
       </p:sp>
       <p:pic>
         <p:nvPicPr>
-          <p:cNvPr id="711074974" name="Picture 7" descr="c3-components.png"/>
+          <p:cNvPr id="621012533" name="Picture 7" descr="c3-components.png"/>
           <p:cNvPicPr>
             <a:picLocks noChangeAspect="1"/>
           </p:cNvPicPr>
@@ -18210,7 +18409,7 @@
       </p:pic>
       <p:sp>
         <p:nvSpPr>
-          <p:cNvPr id="828760635" name="TextBox 8"/>
+          <p:cNvPr id="1060200214" name="TextBox 8"/>
           <p:cNvSpPr txBox="1"/>
           <p:nvPr/>
         </p:nvSpPr>
@@ -18248,7 +18447,7 @@
       </p:sp>
       <p:pic>
         <p:nvPicPr>
-          <p:cNvPr id="82125310" name=""/>
+          <p:cNvPr id="1084184875" name=""/>
           <p:cNvPicPr>
             <a:picLocks noChangeAspect="1"/>
           </p:cNvPicPr>
@@ -18303,7 +18502,7 @@
       </p:grpSpPr>
       <p:sp>
         <p:nvSpPr>
-          <p:cNvPr id="1248924471" name="Rectangle 1"/>
+          <p:cNvPr id="1775333172" name="Rectangle 1"/>
           <p:cNvSpPr/>
           <p:nvPr/>
         </p:nvSpPr>
@@ -18350,7 +18549,7 @@
       </p:sp>
       <p:sp>
         <p:nvSpPr>
-          <p:cNvPr id="1389386684" name="TextBox 2"/>
+          <p:cNvPr id="1449185429" name="TextBox 2"/>
           <p:cNvSpPr txBox="1"/>
           <p:nvPr/>
         </p:nvSpPr>
@@ -18403,7 +18602,7 @@
       </p:sp>
       <p:sp>
         <p:nvSpPr>
-          <p:cNvPr id="1438229195" name="Rectangle 3"/>
+          <p:cNvPr id="1157935048" name="Rectangle 3"/>
           <p:cNvSpPr/>
           <p:nvPr/>
         </p:nvSpPr>
@@ -18450,7 +18649,7 @@
       </p:sp>
       <p:sp>
         <p:nvSpPr>
-          <p:cNvPr id="1384720019" name="TextBox 4"/>
+          <p:cNvPr id="134761607" name="TextBox 4"/>
           <p:cNvSpPr txBox="1"/>
           <p:nvPr/>
         </p:nvSpPr>
@@ -18488,7 +18687,7 @@
       </p:sp>
       <p:sp>
         <p:nvSpPr>
-          <p:cNvPr id="828105169" name="TextBox 5"/>
+          <p:cNvPr id="704951935" name="TextBox 5"/>
           <p:cNvSpPr txBox="1"/>
           <p:nvPr/>
         </p:nvSpPr>
@@ -18526,7 +18725,7 @@
       </p:sp>
       <p:sp>
         <p:nvSpPr>
-          <p:cNvPr id="1188062591" name="TextBox 6"/>
+          <p:cNvPr id="1312544849" name="TextBox 6"/>
           <p:cNvSpPr txBox="1"/>
           <p:nvPr/>
         </p:nvSpPr>
@@ -18801,7 +19000,7 @@
       </p:sp>
       <p:pic>
         <p:nvPicPr>
-          <p:cNvPr id="479708255" name=""/>
+          <p:cNvPr id="2089004291" name=""/>
           <p:cNvPicPr>
             <a:picLocks noChangeAspect="1"/>
           </p:cNvPicPr>
